--- a/Geschichte_11/Stunde_Solon_Gruppenpuzzle/Folien_Geld_statt_Blut.pptx
+++ b/Geschichte_11/Stunde_Solon_Gruppenpuzzle/Folien_Geld_statt_Blut.pptx
@@ -21,9 +21,11 @@
     <p:sldId id="269" r:id="rId15"/>
     <p:sldId id="270" r:id="rId16"/>
     <p:sldId id="271" r:id="rId17"/>
+    <p:sldId id="272" r:id="rId18"/>
+    <p:sldId id="273" r:id="rId19"/>
   </p:sldIdLst>
   <p:notesMasterIdLst>
-    <p:notesMasterId r:id="rId18"/>
+    <p:notesMasterId r:id="rId20"/>
   </p:notesMasterIdLst>
   <p:sldSz cx="9144000" cy="5143500"/>
   <p:notesSz cx="5143500" cy="9144000"/>
@@ -693,7 +695,7 @@
           <a:p>
             <a:r>
               <a:rPr lang="en-US" dirty="0"/>
-              <a:t>32–33 Min. Ergebnis kurz notieren. Erwartung: Die meisten sagen Nein.</a:t>
+              <a:t>29–35 Min. Folie ohne Schaubild zeigen – erst danach die Lösung. Wer fertig ist, wartet auf die Lösung. Das Blatt kommt ins Heft; einsammeln zeigt, wer das Schaubild verstanden hat.</a:t>
             </a:r>
             <a:endParaRPr lang="en-US" dirty="0"/>
           </a:p>
@@ -781,7 +783,7 @@
           <a:p>
             <a:r>
               <a:rPr lang="en-US" dirty="0"/>
-              <a:t>33–37 Min. Partnerarbeit, kein Plenum – die Lösung kommt auf der nächsten Folie.</a:t>
+              <a:t>Selbstkontrolle, kein Plenum. Fehler farbig markieren lassen.</a:t>
             </a:r>
             <a:endParaRPr lang="en-US" dirty="0"/>
           </a:p>
@@ -869,7 +871,7 @@
           <a:p>
             <a:r>
               <a:rPr lang="en-US" dirty="0"/>
-              <a:t>37–39 Min. Merksatz ins Heft. Die Schlussfrage nicht beantworten – sie führt zu Kleisthenes.</a:t>
+              <a:t>35–36 Min. Ergebnis kurz notieren. Erwartung: Die meisten sagen Nein.</a:t>
             </a:r>
             <a:endParaRPr lang="en-US" dirty="0"/>
           </a:p>
@@ -957,7 +959,7 @@
           <a:p>
             <a:r>
               <a:rPr lang="en-US" dirty="0"/>
-              <a:t>39–45 Min. Ein bis zwei Schüler lesen vor, möglichst mit unterschiedlichen Ergebnissen.</a:t>
+              <a:t>36–40 Min. Partnerarbeit, kein Plenum – die Lösung kommt auf der nächsten Folie.</a:t>
             </a:r>
             <a:endParaRPr lang="en-US" dirty="0"/>
           </a:p>
@@ -1045,7 +1047,7 @@
           <a:p>
             <a:r>
               <a:rPr lang="en-US" dirty="0"/>
-              <a:t>Beispiel, keine Musterantwort. Auch „eher demokratisch“ ist mit Belegen vertretbar.</a:t>
+              <a:t>40–42 Min. Merksatz ins Heft. Die Schlussfrage nicht beantworten – sie führt zu Kleisthenes.</a:t>
             </a:r>
             <a:endParaRPr lang="en-US" dirty="0"/>
           </a:p>
@@ -1133,7 +1135,7 @@
           <a:p>
             <a:r>
               <a:rPr lang="en-US" dirty="0"/>
-              <a:t>Nächste Stunde: Gewinner-Verlierer-Linie als Einstieg, dann Peisistratos (LB S. 22).</a:t>
+              <a:t>42–45 Min. Ein bis zwei Schüler lesen vor, möglichst mit unterschiedlichen Ergebnissen.</a:t>
             </a:r>
             <a:endParaRPr lang="en-US" dirty="0"/>
           </a:p>
@@ -1157,6 +1159,182 @@
             <a:fld id="{F7021451-1387-4CA6-816F-3879F97B5CBC}" type="slidenum">
               <a:rPr lang="en-US"/>
               <a:t>16</a:t>
+            </a:fld>
+            <a:endParaRPr lang="en-US"/>
+          </a:p>
+        </p:txBody>
+      </p:sp>
+    </p:spTree>
+    <p:extLst>
+      <p:ext uri="{BB962C8B-B14F-4D97-AF65-F5344CB8AC3E}">
+        <p14:creationId xmlns:p14="http://schemas.microsoft.com/office/powerpoint/2010/main" val="1024086991"/>
+      </p:ext>
+    </p:extLst>
+  </p:cSld>
+  <p:clrMapOvr>
+    <a:masterClrMapping/>
+  </p:clrMapOvr>
+</p:notes>
+</file>
+
+<file path=ppt/notesSlides/notesSlide17.xml><?xml version="1.0" encoding="utf-8"?>
+<p:notes xmlns:a="http://schemas.openxmlformats.org/drawingml/2006/main" xmlns:r="http://schemas.openxmlformats.org/officeDocument/2006/relationships" xmlns:p="http://schemas.openxmlformats.org/presentationml/2006/main">
+  <p:cSld>
+    <p:spTree>
+      <p:nvGrpSpPr>
+        <p:cNvPr id="1" name=""/>
+        <p:cNvGrpSpPr/>
+        <p:nvPr/>
+      </p:nvGrpSpPr>
+      <p:grpSpPr>
+        <a:xfrm>
+          <a:off x="0" y="0"/>
+          <a:ext cx="0" cy="0"/>
+          <a:chOff x="0" y="0"/>
+          <a:chExt cx="0" cy="0"/>
+        </a:xfrm>
+      </p:grpSpPr>
+      <p:sp>
+        <p:nvSpPr>
+          <p:cNvPr id="2" name="Slide Image Placeholder 1"/>
+          <p:cNvSpPr>
+            <a:spLocks noGrp="1" noRot="1" noChangeAspect="1"/>
+          </p:cNvSpPr>
+          <p:nvPr>
+            <p:ph type="sldImg"/>
+          </p:nvPr>
+        </p:nvSpPr>
+        <p:spPr/>
+      </p:sp>
+      <p:sp>
+        <p:nvSpPr>
+          <p:cNvPr id="3" name="Notes Placeholder 2"/>
+          <p:cNvSpPr>
+            <a:spLocks noGrp="1"/>
+          </p:cNvSpPr>
+          <p:nvPr>
+            <p:ph type="body" idx="1"/>
+          </p:nvPr>
+        </p:nvSpPr>
+        <p:spPr/>
+        <p:txBody>
+          <a:bodyPr/>
+          <a:lstStyle/>
+          <a:p>
+            <a:r>
+              <a:rPr lang="en-US" dirty="0"/>
+              <a:t>Beispiel, keine Musterantwort. Auch „eher demokratisch“ ist mit Belegen vertretbar.</a:t>
+            </a:r>
+            <a:endParaRPr lang="en-US" dirty="0"/>
+          </a:p>
+        </p:txBody>
+      </p:sp>
+      <p:sp>
+        <p:nvSpPr>
+          <p:cNvPr id="4" name="Slide Number Placeholder 3"/>
+          <p:cNvSpPr>
+            <a:spLocks noGrp="1"/>
+          </p:cNvSpPr>
+          <p:nvPr>
+            <p:ph type="sldNum" sz="quarter" idx="10"/>
+          </p:nvPr>
+        </p:nvSpPr>
+        <p:spPr/>
+        <p:txBody>
+          <a:bodyPr/>
+          <a:lstStyle/>
+          <a:p>
+            <a:fld id="{F7021451-1387-4CA6-816F-3879F97B5CBC}" type="slidenum">
+              <a:rPr lang="en-US"/>
+              <a:t>17</a:t>
+            </a:fld>
+            <a:endParaRPr lang="en-US"/>
+          </a:p>
+        </p:txBody>
+      </p:sp>
+    </p:spTree>
+    <p:extLst>
+      <p:ext uri="{BB962C8B-B14F-4D97-AF65-F5344CB8AC3E}">
+        <p14:creationId xmlns:p14="http://schemas.microsoft.com/office/powerpoint/2010/main" val="1024086991"/>
+      </p:ext>
+    </p:extLst>
+  </p:cSld>
+  <p:clrMapOvr>
+    <a:masterClrMapping/>
+  </p:clrMapOvr>
+</p:notes>
+</file>
+
+<file path=ppt/notesSlides/notesSlide18.xml><?xml version="1.0" encoding="utf-8"?>
+<p:notes xmlns:a="http://schemas.openxmlformats.org/drawingml/2006/main" xmlns:r="http://schemas.openxmlformats.org/officeDocument/2006/relationships" xmlns:p="http://schemas.openxmlformats.org/presentationml/2006/main">
+  <p:cSld>
+    <p:spTree>
+      <p:nvGrpSpPr>
+        <p:cNvPr id="1" name=""/>
+        <p:cNvGrpSpPr/>
+        <p:nvPr/>
+      </p:nvGrpSpPr>
+      <p:grpSpPr>
+        <a:xfrm>
+          <a:off x="0" y="0"/>
+          <a:ext cx="0" cy="0"/>
+          <a:chOff x="0" y="0"/>
+          <a:chExt cx="0" cy="0"/>
+        </a:xfrm>
+      </p:grpSpPr>
+      <p:sp>
+        <p:nvSpPr>
+          <p:cNvPr id="2" name="Slide Image Placeholder 1"/>
+          <p:cNvSpPr>
+            <a:spLocks noGrp="1" noRot="1" noChangeAspect="1"/>
+          </p:cNvSpPr>
+          <p:nvPr>
+            <p:ph type="sldImg"/>
+          </p:nvPr>
+        </p:nvSpPr>
+        <p:spPr/>
+      </p:sp>
+      <p:sp>
+        <p:nvSpPr>
+          <p:cNvPr id="3" name="Notes Placeholder 2"/>
+          <p:cNvSpPr>
+            <a:spLocks noGrp="1"/>
+          </p:cNvSpPr>
+          <p:nvPr>
+            <p:ph type="body" idx="1"/>
+          </p:nvPr>
+        </p:nvSpPr>
+        <p:spPr/>
+        <p:txBody>
+          <a:bodyPr/>
+          <a:lstStyle/>
+          <a:p>
+            <a:r>
+              <a:rPr lang="en-US" dirty="0"/>
+              <a:t>Nächste Stunde: Gewinner-Verlierer-Linie als Einstieg, dann Peisistratos (LB S. 22).</a:t>
+            </a:r>
+            <a:endParaRPr lang="en-US" dirty="0"/>
+          </a:p>
+        </p:txBody>
+      </p:sp>
+      <p:sp>
+        <p:nvSpPr>
+          <p:cNvPr id="4" name="Slide Number Placeholder 3"/>
+          <p:cNvSpPr>
+            <a:spLocks noGrp="1"/>
+          </p:cNvSpPr>
+          <p:nvPr>
+            <p:ph type="sldNum" sz="quarter" idx="10"/>
+          </p:nvPr>
+        </p:nvSpPr>
+        <p:spPr/>
+        <p:txBody>
+          <a:bodyPr/>
+          <a:lstStyle/>
+          <a:p>
+            <a:fld id="{F7021451-1387-4CA6-816F-3879F97B5CBC}" type="slidenum">
+              <a:rPr lang="en-US"/>
+              <a:t>18</a:t>
             </a:fld>
             <a:endParaRPr lang="en-US"/>
           </a:p>
@@ -1573,7 +1751,7 @@
           <a:p>
             <a:r>
               <a:rPr lang="en-US" dirty="0"/>
-              <a:t>7–8 Min. Stammgruppen à 4 bilden (bei 5er-Gruppen bekommt der Fünfte Karte E). Jede Stammgruppe bekommt einen Kartensatz A–D. Die Lösung auf der Karte bleibt zunächst nach hinten geknickt.</a:t>
+              <a:t>7–8 Min. Stammgruppen à 4 bilden (bei 5er-Gruppen bekommt der Fünfte Karte E). Jede Stammgruppe bekommt einen Kartensatz A–D. Die Lösungskarten bleiben am Pult.</a:t>
             </a:r>
             <a:endParaRPr lang="en-US" dirty="0"/>
           </a:p>
@@ -1749,7 +1927,7 @@
           <a:p>
             <a:r>
               <a:rPr lang="en-US" dirty="0"/>
-              <a:t>14–20 Min. Bei mehr als vier Schülern mit demselben Buchstaben zwei Expertengruppen bilden.</a:t>
+              <a:t>13–19 Min. Lösungskarte nur gegen Vorzeigen der schriftlichen Antworten (kurzer Blick genügt). Bei mehr als vier Schülern mit demselben Buchstaben zwei Expertengruppen bilden.</a:t>
             </a:r>
             <a:endParaRPr lang="en-US" dirty="0"/>
           </a:p>
@@ -1837,7 +2015,7 @@
           <a:p>
             <a:r>
               <a:rPr lang="en-US" dirty="0"/>
-              <a:t>20–32 Min. Pro Anfrage etwa 3 Minuten. Ein Zeitsignal nach jeder Runde hilft. Bei 5er-Gruppen kommt E dazu.</a:t>
+              <a:t>19–29 Min. Pro Anfrage etwa 2½ Minuten. Ein Zeitsignal nach jeder Runde hilft. Bei 5er-Gruppen kommt E dazu.</a:t>
             </a:r>
             <a:endParaRPr lang="en-US" dirty="0"/>
           </a:p>
@@ -4237,7 +4415,7 @@
     <p:bg>
       <p:bgPr>
         <a:solidFill>
-          <a:srgbClr val="2B2318"/>
+          <a:srgbClr val="FFFFFF"/>
         </a:solidFill>
       </p:bgPr>
     </p:bg>
@@ -4282,13 +4460,13 @@
             <a:r>
               <a:rPr lang="en-US" sz="1100" b="1" spc="200" kern="0" dirty="0">
                 <a:solidFill>
-                  <a:srgbClr val="D9A441"/>
+                  <a:srgbClr val="AD4426"/>
                 </a:solidFill>
                 <a:latin typeface="Calibri" pitchFamily="34" charset="0"/>
                 <a:ea typeface="Calibri" pitchFamily="34" charset="-122"/>
                 <a:cs typeface="Calibri" pitchFamily="34" charset="-120"/>
               </a:rPr>
-              <a:t>ALLE LEGEN SICH FEST</a:t>
+              <a:t>SICHERUNG · EINZELARBEIT · BLATT</a:t>
             </a:r>
             <a:endParaRPr lang="en-US" sz="1100" dirty="0"/>
           </a:p>
@@ -4321,13 +4499,13 @@
             <a:r>
               <a:rPr lang="en-US" sz="2800" b="1" dirty="0">
                 <a:solidFill>
-                  <a:srgbClr val="FFFFFF"/>
+                  <a:srgbClr val="2B2318"/>
                 </a:solidFill>
                 <a:latin typeface="Cambria" pitchFamily="34" charset="0"/>
                 <a:ea typeface="Cambria" pitchFamily="34" charset="-122"/>
                 <a:cs typeface="Cambria" pitchFamily="34" charset="-120"/>
               </a:rPr>
-              <a:t>Ist Solons Verfassung eine Demokratie?</a:t>
+              <a:t>Solons Verfassung aus dem Gedächtnis</a:t>
             </a:r>
             <a:endParaRPr lang="en-US" sz="2800" dirty="0"/>
           </a:p>
@@ -4350,7 +4528,7 @@
             </a:avLst>
           </a:prstGeom>
           <a:solidFill>
-            <a:srgbClr val="D9A441"/>
+            <a:srgbClr val="2B2318"/>
           </a:solidFill>
           <a:ln/>
         </p:spPr>
@@ -4364,13 +4542,13 @@
             <a:r>
               <a:rPr lang="en-US" sz="1100" b="1" dirty="0">
                 <a:solidFill>
-                  <a:srgbClr val="2B2318"/>
+                  <a:srgbClr val="FFFFFF"/>
                 </a:solidFill>
                 <a:latin typeface="Calibri" pitchFamily="34" charset="0"/>
                 <a:ea typeface="Calibri" pitchFamily="34" charset="-122"/>
                 <a:cs typeface="Calibri" pitchFamily="34" charset="-120"/>
               </a:rPr>
-              <a:t>1 Min.</a:t>
+              <a:t>6 Min.</a:t>
             </a:r>
             <a:endParaRPr lang="en-US" sz="1100" dirty="0"/>
           </a:p>
@@ -4384,20 +4562,20 @@
         </p:nvSpPr>
         <p:spPr>
           <a:xfrm>
-            <a:off x="457200" y="1463040"/>
-            <a:ext cx="8229600" cy="1463040"/>
+            <a:off x="457200" y="1234440"/>
+            <a:ext cx="8229600" cy="640080"/>
           </a:xfrm>
           <a:prstGeom prst="roundRect">
             <a:avLst>
-              <a:gd name="adj" fmla="val 5000"/>
+              <a:gd name="adj" fmla="val 11429"/>
             </a:avLst>
           </a:prstGeom>
           <a:solidFill>
-            <a:srgbClr val="3A3024"/>
+            <a:srgbClr val="AD4426"/>
           </a:solidFill>
           <a:ln w="12700">
             <a:solidFill>
-              <a:srgbClr val="3A3024"/>
+              <a:srgbClr val="AD4426"/>
             </a:solidFill>
             <a:prstDash val="solid"/>
           </a:ln>
@@ -4411,32 +4589,32 @@
         </p:nvSpPr>
         <p:spPr>
           <a:xfrm>
-            <a:off x="731520" y="1554480"/>
-            <a:ext cx="7680960" cy="457200"/>
-          </a:xfrm>
-          <a:prstGeom prst="rect">
-            <a:avLst/>
-          </a:prstGeom>
-          <a:noFill/>
-          <a:ln/>
-        </p:spPr>
-        <p:txBody>
-          <a:bodyPr wrap="square" lIns="0" tIns="0" rIns="0" bIns="0" rtlCol="0" anchor="t"/>
+            <a:off x="685800" y="1234440"/>
+            <a:ext cx="7772400" cy="640080"/>
+          </a:xfrm>
+          <a:prstGeom prst="rect">
+            <a:avLst/>
+          </a:prstGeom>
+          <a:noFill/>
+          <a:ln/>
+        </p:spPr>
+        <p:txBody>
+          <a:bodyPr wrap="square" lIns="0" tIns="0" rIns="0" bIns="0" rtlCol="0" anchor="ctr"/>
           <a:lstStyle/>
           <a:p>
             <a:pPr indent="0" marL="0">
               <a:buNone/>
             </a:pPr>
             <a:r>
-              <a:rPr lang="en-US" sz="1600" dirty="0">
-                <a:solidFill>
-                  <a:srgbClr val="E8DFD0"/>
+              <a:rPr lang="en-US" sz="1600" b="1" dirty="0">
+                <a:solidFill>
+                  <a:srgbClr val="FFFFFF"/>
                 </a:solidFill>
                 <a:latin typeface="Calibri" pitchFamily="34" charset="0"/>
                 <a:ea typeface="Calibri" pitchFamily="34" charset="-122"/>
                 <a:cs typeface="Calibri" pitchFamily="34" charset="-120"/>
               </a:rPr>
-              <a:t>Denk an „Geld statt Blut“ und an eure Anfragen. Zeige auf mein Zeichen:</a:t>
+              <a:t>Buch und Heft zu! Das Schaubild auf dem Blatt ist anders angeordnet als im Buch.</a:t>
             </a:r>
             <a:endParaRPr lang="en-US" sz="1600" dirty="0"/>
           </a:p>
@@ -4450,24 +4628,26 @@
         </p:nvSpPr>
         <p:spPr>
           <a:xfrm>
-            <a:off x="731520" y="2057400"/>
-            <a:ext cx="7680960" cy="640080"/>
-          </a:xfrm>
-          <a:prstGeom prst="rect">
-            <a:avLst/>
-          </a:prstGeom>
-          <a:noFill/>
-          <a:ln/>
-        </p:spPr>
-        <p:txBody>
-          <a:bodyPr wrap="square" lIns="0" tIns="0" rIns="0" bIns="0" rtlCol="0" anchor="t"/>
-          <a:lstStyle/>
-          <a:p>
-            <a:pPr indent="0" marL="0">
-              <a:buNone/>
-            </a:pPr>
-            <a:r>
-              <a:rPr lang="en-US" sz="2000" b="1" dirty="0">
+            <a:off x="457200" y="2103120"/>
+            <a:ext cx="365760" cy="365760"/>
+          </a:xfrm>
+          <a:prstGeom prst="ellipse">
+            <a:avLst/>
+          </a:prstGeom>
+          <a:solidFill>
+            <a:srgbClr val="AD4426"/>
+          </a:solidFill>
+          <a:ln/>
+        </p:spPr>
+        <p:txBody>
+          <a:bodyPr wrap="square" lIns="0" tIns="0" rIns="0" bIns="0" rtlCol="0" anchor="ctr"/>
+          <a:lstStyle/>
+          <a:p>
+            <a:pPr algn="ctr" indent="0" marL="0">
+              <a:buNone/>
+            </a:pPr>
+            <a:r>
+              <a:rPr lang="en-US" sz="1400" b="1" dirty="0">
                 <a:solidFill>
                   <a:srgbClr val="FFFFFF"/>
                 </a:solidFill>
@@ -4475,15 +4655,333 @@
                 <a:ea typeface="Cambria" pitchFamily="34" charset="-122"/>
                 <a:cs typeface="Cambria" pitchFamily="34" charset="-120"/>
               </a:rPr>
-              <a:t>Daumen hoch = Ja      Daumen runter = Nein</a:t>
-            </a:r>
-            <a:endParaRPr lang="en-US" sz="2000" dirty="0"/>
+              <a:t>1</a:t>
+            </a:r>
+            <a:endParaRPr lang="en-US" sz="1400" dirty="0"/>
           </a:p>
         </p:txBody>
       </p:sp>
       <p:sp>
         <p:nvSpPr>
           <p:cNvPr id="8" name="Text 6"/>
+          <p:cNvSpPr txBox="1"/>
+          <p:nvPr/>
+        </p:nvSpPr>
+        <p:spPr>
+          <a:xfrm>
+            <a:off x="960120" y="2066544"/>
+            <a:ext cx="7726680" cy="566928"/>
+          </a:xfrm>
+          <a:prstGeom prst="rect">
+            <a:avLst/>
+          </a:prstGeom>
+          <a:noFill/>
+          <a:ln/>
+        </p:spPr>
+        <p:txBody>
+          <a:bodyPr wrap="square" lIns="0" tIns="0" rIns="0" bIns="0" rtlCol="0" anchor="ctr"/>
+          <a:lstStyle/>
+          <a:p>
+            <a:pPr indent="0" marL="0">
+              <a:buNone/>
+            </a:pPr>
+            <a:r>
+              <a:rPr lang="en-US" sz="1400" dirty="0">
+                <a:solidFill>
+                  <a:srgbClr val="2B2318"/>
+                </a:solidFill>
+                <a:latin typeface="Calibri" pitchFamily="34" charset="0"/>
+                <a:ea typeface="Calibri" pitchFamily="34" charset="-122"/>
+                <a:cs typeface="Calibri" pitchFamily="34" charset="-120"/>
+              </a:rPr>
+              <a:t>Trage die Klassen und Organe in die leeren Kästen ein und ergänze die Überschrift.</a:t>
+            </a:r>
+            <a:endParaRPr lang="en-US" sz="1400" dirty="0"/>
+          </a:p>
+        </p:txBody>
+      </p:sp>
+      <p:sp>
+        <p:nvSpPr>
+          <p:cNvPr id="9" name="Text 7"/>
+          <p:cNvSpPr txBox="1"/>
+          <p:nvPr/>
+        </p:nvSpPr>
+        <p:spPr>
+          <a:xfrm>
+            <a:off x="457200" y="2706624"/>
+            <a:ext cx="365760" cy="365760"/>
+          </a:xfrm>
+          <a:prstGeom prst="ellipse">
+            <a:avLst/>
+          </a:prstGeom>
+          <a:solidFill>
+            <a:srgbClr val="AD4426"/>
+          </a:solidFill>
+          <a:ln/>
+        </p:spPr>
+        <p:txBody>
+          <a:bodyPr wrap="square" lIns="0" tIns="0" rIns="0" bIns="0" rtlCol="0" anchor="ctr"/>
+          <a:lstStyle/>
+          <a:p>
+            <a:pPr algn="ctr" indent="0" marL="0">
+              <a:buNone/>
+            </a:pPr>
+            <a:r>
+              <a:rPr lang="en-US" sz="1400" b="1" dirty="0">
+                <a:solidFill>
+                  <a:srgbClr val="FFFFFF"/>
+                </a:solidFill>
+                <a:latin typeface="Cambria" pitchFamily="34" charset="0"/>
+                <a:ea typeface="Cambria" pitchFamily="34" charset="-122"/>
+                <a:cs typeface="Cambria" pitchFamily="34" charset="-120"/>
+              </a:rPr>
+              <a:t>2</a:t>
+            </a:r>
+            <a:endParaRPr lang="en-US" sz="1400" dirty="0"/>
+          </a:p>
+        </p:txBody>
+      </p:sp>
+      <p:sp>
+        <p:nvSpPr>
+          <p:cNvPr id="10" name="Text 8"/>
+          <p:cNvSpPr txBox="1"/>
+          <p:nvPr/>
+        </p:nvSpPr>
+        <p:spPr>
+          <a:xfrm>
+            <a:off x="960120" y="2670048"/>
+            <a:ext cx="7726680" cy="566928"/>
+          </a:xfrm>
+          <a:prstGeom prst="rect">
+            <a:avLst/>
+          </a:prstGeom>
+          <a:noFill/>
+          <a:ln/>
+        </p:spPr>
+        <p:txBody>
+          <a:bodyPr wrap="square" lIns="0" tIns="0" rIns="0" bIns="0" rtlCol="0" anchor="ctr"/>
+          <a:lstStyle/>
+          <a:p>
+            <a:pPr indent="0" marL="0">
+              <a:buNone/>
+            </a:pPr>
+            <a:r>
+              <a:rPr lang="en-US" sz="1400" dirty="0">
+                <a:solidFill>
+                  <a:srgbClr val="2B2318"/>
+                </a:solidFill>
+                <a:latin typeface="Calibri" pitchFamily="34" charset="0"/>
+                <a:ea typeface="Calibri" pitchFamily="34" charset="-122"/>
+                <a:cs typeface="Calibri" pitchFamily="34" charset="-120"/>
+              </a:rPr>
+              <a:t>Schreibe auf, was die Pfeile 1–5 bedeuten.</a:t>
+            </a:r>
+            <a:endParaRPr lang="en-US" sz="1400" dirty="0"/>
+          </a:p>
+        </p:txBody>
+      </p:sp>
+      <p:sp>
+        <p:nvSpPr>
+          <p:cNvPr id="11" name="Text 9"/>
+          <p:cNvSpPr txBox="1"/>
+          <p:nvPr/>
+        </p:nvSpPr>
+        <p:spPr>
+          <a:xfrm>
+            <a:off x="457200" y="3310128"/>
+            <a:ext cx="365760" cy="365760"/>
+          </a:xfrm>
+          <a:prstGeom prst="ellipse">
+            <a:avLst/>
+          </a:prstGeom>
+          <a:solidFill>
+            <a:srgbClr val="AD4426"/>
+          </a:solidFill>
+          <a:ln/>
+        </p:spPr>
+        <p:txBody>
+          <a:bodyPr wrap="square" lIns="0" tIns="0" rIns="0" bIns="0" rtlCol="0" anchor="ctr"/>
+          <a:lstStyle/>
+          <a:p>
+            <a:pPr algn="ctr" indent="0" marL="0">
+              <a:buNone/>
+            </a:pPr>
+            <a:r>
+              <a:rPr lang="en-US" sz="1400" b="1" dirty="0">
+                <a:solidFill>
+                  <a:srgbClr val="FFFFFF"/>
+                </a:solidFill>
+                <a:latin typeface="Cambria" pitchFamily="34" charset="0"/>
+                <a:ea typeface="Cambria" pitchFamily="34" charset="-122"/>
+                <a:cs typeface="Cambria" pitchFamily="34" charset="-120"/>
+              </a:rPr>
+              <a:t>3</a:t>
+            </a:r>
+            <a:endParaRPr lang="en-US" sz="1400" dirty="0"/>
+          </a:p>
+        </p:txBody>
+      </p:sp>
+      <p:sp>
+        <p:nvSpPr>
+          <p:cNvPr id="12" name="Text 10"/>
+          <p:cNvSpPr txBox="1"/>
+          <p:nvPr/>
+        </p:nvSpPr>
+        <p:spPr>
+          <a:xfrm>
+            <a:off x="960120" y="3273552"/>
+            <a:ext cx="7726680" cy="566928"/>
+          </a:xfrm>
+          <a:prstGeom prst="rect">
+            <a:avLst/>
+          </a:prstGeom>
+          <a:noFill/>
+          <a:ln/>
+        </p:spPr>
+        <p:txBody>
+          <a:bodyPr wrap="square" lIns="0" tIns="0" rIns="0" bIns="0" rtlCol="0" anchor="ctr"/>
+          <a:lstStyle/>
+          <a:p>
+            <a:pPr indent="0" marL="0">
+              <a:buNone/>
+            </a:pPr>
+            <a:r>
+              <a:rPr lang="en-US" sz="1400" dirty="0">
+                <a:solidFill>
+                  <a:srgbClr val="2B2318"/>
+                </a:solidFill>
+                <a:latin typeface="Calibri" pitchFamily="34" charset="0"/>
+                <a:ea typeface="Calibri" pitchFamily="34" charset="-122"/>
+                <a:cs typeface="Calibri" pitchFamily="34" charset="-120"/>
+              </a:rPr>
+              <a:t>Lykon ist Thete: Kreise grün ein, was er darf. Streiche rot durch, was er nicht darf.</a:t>
+            </a:r>
+            <a:endParaRPr lang="en-US" sz="1400" dirty="0"/>
+          </a:p>
+        </p:txBody>
+      </p:sp>
+      <p:sp>
+        <p:nvSpPr>
+          <p:cNvPr id="13" name="Text 11"/>
+          <p:cNvSpPr txBox="1"/>
+          <p:nvPr/>
+        </p:nvSpPr>
+        <p:spPr>
+          <a:xfrm>
+            <a:off x="457200" y="3913632"/>
+            <a:ext cx="365760" cy="365760"/>
+          </a:xfrm>
+          <a:prstGeom prst="ellipse">
+            <a:avLst/>
+          </a:prstGeom>
+          <a:solidFill>
+            <a:srgbClr val="AD4426"/>
+          </a:solidFill>
+          <a:ln/>
+        </p:spPr>
+        <p:txBody>
+          <a:bodyPr wrap="square" lIns="0" tIns="0" rIns="0" bIns="0" rtlCol="0" anchor="ctr"/>
+          <a:lstStyle/>
+          <a:p>
+            <a:pPr algn="ctr" indent="0" marL="0">
+              <a:buNone/>
+            </a:pPr>
+            <a:r>
+              <a:rPr lang="en-US" sz="1400" b="1" dirty="0">
+                <a:solidFill>
+                  <a:srgbClr val="FFFFFF"/>
+                </a:solidFill>
+                <a:latin typeface="Cambria" pitchFamily="34" charset="0"/>
+                <a:ea typeface="Cambria" pitchFamily="34" charset="-122"/>
+                <a:cs typeface="Cambria" pitchFamily="34" charset="-120"/>
+              </a:rPr>
+              <a:t>4</a:t>
+            </a:r>
+            <a:endParaRPr lang="en-US" sz="1400" dirty="0"/>
+          </a:p>
+        </p:txBody>
+      </p:sp>
+      <p:sp>
+        <p:nvSpPr>
+          <p:cNvPr id="14" name="Text 12"/>
+          <p:cNvSpPr txBox="1"/>
+          <p:nvPr/>
+        </p:nvSpPr>
+        <p:spPr>
+          <a:xfrm>
+            <a:off x="960120" y="3877056"/>
+            <a:ext cx="7726680" cy="566928"/>
+          </a:xfrm>
+          <a:prstGeom prst="rect">
+            <a:avLst/>
+          </a:prstGeom>
+          <a:noFill/>
+          <a:ln/>
+        </p:spPr>
+        <p:txBody>
+          <a:bodyPr wrap="square" lIns="0" tIns="0" rIns="0" bIns="0" rtlCol="0" anchor="ctr"/>
+          <a:lstStyle/>
+          <a:p>
+            <a:pPr indent="0" marL="0">
+              <a:buNone/>
+            </a:pPr>
+            <a:r>
+              <a:rPr lang="en-US" sz="1400" dirty="0">
+                <a:solidFill>
+                  <a:srgbClr val="2B2318"/>
+                </a:solidFill>
+                <a:latin typeface="Calibri" pitchFamily="34" charset="0"/>
+                <a:ea typeface="Calibri" pitchFamily="34" charset="-122"/>
+                <a:cs typeface="Calibri" pitchFamily="34" charset="-120"/>
+              </a:rPr>
+              <a:t>Danach: Vergleiche mit der Lösung und markiere deine Fehler farbig.</a:t>
+            </a:r>
+            <a:endParaRPr lang="en-US" sz="1400" dirty="0"/>
+          </a:p>
+        </p:txBody>
+      </p:sp>
+      <p:sp>
+        <p:nvSpPr>
+          <p:cNvPr id="15" name="Text 13"/>
+          <p:cNvSpPr txBox="1"/>
+          <p:nvPr/>
+        </p:nvSpPr>
+        <p:spPr>
+          <a:xfrm>
+            <a:off x="457200" y="4754880"/>
+            <a:ext cx="4572000" cy="182880"/>
+          </a:xfrm>
+          <a:prstGeom prst="rect">
+            <a:avLst/>
+          </a:prstGeom>
+          <a:noFill/>
+          <a:ln/>
+        </p:spPr>
+        <p:txBody>
+          <a:bodyPr wrap="square" lIns="0" tIns="0" rIns="0" bIns="0" rtlCol="0" anchor="t"/>
+          <a:lstStyle/>
+          <a:p>
+            <a:pPr indent="0" marL="0">
+              <a:buNone/>
+            </a:pPr>
+            <a:r>
+              <a:rPr lang="en-US" sz="900" dirty="0">
+                <a:solidFill>
+                  <a:srgbClr val="998C77"/>
+                </a:solidFill>
+                <a:latin typeface="Calibri" pitchFamily="34" charset="0"/>
+                <a:ea typeface="Calibri" pitchFamily="34" charset="-122"/>
+                <a:cs typeface="Calibri" pitchFamily="34" charset="-120"/>
+              </a:rPr>
+              <a:t>Geld statt Blut? Solons Verfassung</a:t>
+            </a:r>
+            <a:endParaRPr lang="en-US" sz="900" dirty="0"/>
+          </a:p>
+        </p:txBody>
+      </p:sp>
+      <p:sp>
+        <p:nvSpPr>
+          <p:cNvPr id="16" name="Text 14"/>
           <p:cNvSpPr txBox="1"/>
           <p:nvPr/>
         </p:nvSpPr>
@@ -4585,7 +5083,7 @@
                 <a:ea typeface="Calibri" pitchFamily="34" charset="-122"/>
                 <a:cs typeface="Calibri" pitchFamily="34" charset="-120"/>
               </a:rPr>
-              <a:t>PARTNERARBEIT · HEFT</a:t>
+              <a:t>SICHERUNG · LÖSUNG</a:t>
             </a:r>
             <a:endParaRPr lang="en-US" sz="1100" dirty="0"/>
           </a:p>
@@ -4624,7 +5122,7 @@
                 <a:ea typeface="Cambria" pitchFamily="34" charset="-122"/>
                 <a:cs typeface="Cambria" pitchFamily="34" charset="-120"/>
               </a:rPr>
-              <a:t>Demokratisch oder timokratisch?</a:t>
+              <a:t>Vergleiche und markiere deine Fehler</a:t>
             </a:r>
             <a:endParaRPr lang="en-US" sz="2800" dirty="0"/>
           </a:p>
@@ -4647,7 +5145,7 @@
             </a:avLst>
           </a:prstGeom>
           <a:solidFill>
-            <a:srgbClr val="2B2318"/>
+            <a:srgbClr val="D9A441"/>
           </a:solidFill>
           <a:ln/>
         </p:spPr>
@@ -4661,71 +5159,56 @@
             <a:r>
               <a:rPr lang="en-US" sz="1100" b="1" dirty="0">
                 <a:solidFill>
-                  <a:srgbClr val="FFFFFF"/>
+                  <a:srgbClr val="2B2318"/>
                 </a:solidFill>
                 <a:latin typeface="Calibri" pitchFamily="34" charset="0"/>
                 <a:ea typeface="Calibri" pitchFamily="34" charset="-122"/>
                 <a:cs typeface="Calibri" pitchFamily="34" charset="-120"/>
               </a:rPr>
-              <a:t>4 Min.</a:t>
+              <a:t>Lösung</a:t>
             </a:r>
             <a:endParaRPr lang="en-US" sz="1100" dirty="0"/>
           </a:p>
         </p:txBody>
       </p:sp>
-      <p:sp>
-        <p:nvSpPr>
-          <p:cNvPr id="5" name="Text 3"/>
-          <p:cNvSpPr txBox="1"/>
-          <p:nvPr/>
-        </p:nvSpPr>
-        <p:spPr>
-          <a:xfrm>
-            <a:off x="457200" y="1143000"/>
-            <a:ext cx="8229600" cy="502920"/>
-          </a:xfrm>
-          <a:prstGeom prst="rect">
-            <a:avLst/>
-          </a:prstGeom>
-          <a:noFill/>
-          <a:ln/>
-        </p:spPr>
-        <p:txBody>
-          <a:bodyPr wrap="square" lIns="0" tIns="0" rIns="0" bIns="0" rtlCol="0" anchor="t"/>
-          <a:lstStyle/>
-          <a:p>
-            <a:pPr indent="0" marL="0">
-              <a:buNone/>
-            </a:pPr>
-            <a:r>
-              <a:rPr lang="en-US" sz="1350" b="1" dirty="0">
-                <a:solidFill>
-                  <a:srgbClr val="5A5044"/>
-                </a:solidFill>
-                <a:latin typeface="Calibri" pitchFamily="34" charset="0"/>
-                <a:ea typeface="Calibri" pitchFamily="34" charset="-122"/>
-                <a:cs typeface="Calibri" pitchFamily="34" charset="-120"/>
-              </a:rPr>
-              <a:t>Legt im Heft zwei Spalten an und ordnet die sechs Merkmale zu: demokratisch = das Volk entscheidet · timokratisch = der Besitz entscheidet.</a:t>
-            </a:r>
-            <a:endParaRPr lang="en-US" sz="1350" dirty="0"/>
-          </a:p>
-        </p:txBody>
-      </p:sp>
-      <p:sp>
-        <p:nvSpPr>
-          <p:cNvPr id="6" name="Shape 4"/>
+      <p:pic>
+        <p:nvPicPr>
+          <p:cNvPr id="5" name="Image 0" descr="/tmp/claude-0/-home-user-Schule/9be99485-7769-5631-81b2-1e426720ceab/scratchpad/stumm_loesung.png">    </p:cNvPr>
+          <p:cNvPicPr>
+            <a:picLocks noChangeAspect="1"/>
+          </p:cNvPicPr>
+          <p:nvPr/>
+        </p:nvPicPr>
+        <p:blipFill>
+          <a:blip r:embed="rId1"/>
+          <a:stretch>
+            <a:fillRect/>
+          </a:stretch>
+        </p:blipFill>
+        <p:spPr>
+          <a:xfrm>
+            <a:off x="457200" y="1188720"/>
+            <a:ext cx="4114800" cy="3236976"/>
+          </a:xfrm>
+          <a:prstGeom prst="rect">
+            <a:avLst/>
+          </a:prstGeom>
+        </p:spPr>
+      </p:pic>
+      <p:sp>
+        <p:nvSpPr>
+          <p:cNvPr id="6" name="Shape 3"/>
           <p:cNvSpPr/>
           <p:nvPr/>
         </p:nvSpPr>
         <p:spPr>
           <a:xfrm>
-            <a:off x="457200" y="1783080"/>
-            <a:ext cx="4023360" cy="731520"/>
+            <a:off x="4983480" y="1188720"/>
+            <a:ext cx="3703320" cy="3246120"/>
           </a:xfrm>
           <a:prstGeom prst="roundRect">
             <a:avLst>
-              <a:gd name="adj" fmla="val 10000"/>
+              <a:gd name="adj" fmla="val 2254"/>
             </a:avLst>
           </a:prstGeom>
           <a:solidFill>
@@ -4741,55 +5224,94 @@
       </p:sp>
       <p:sp>
         <p:nvSpPr>
-          <p:cNvPr id="7" name="Text 5"/>
-          <p:cNvSpPr txBox="1"/>
-          <p:nvPr/>
-        </p:nvSpPr>
-        <p:spPr>
-          <a:xfrm>
-            <a:off x="594360" y="1938528"/>
-            <a:ext cx="420624" cy="420624"/>
-          </a:xfrm>
-          <a:prstGeom prst="ellipse">
-            <a:avLst/>
-          </a:prstGeom>
-          <a:solidFill>
-            <a:srgbClr val="2B2318"/>
-          </a:solidFill>
-          <a:ln/>
-        </p:spPr>
-        <p:txBody>
-          <a:bodyPr wrap="square" lIns="0" tIns="0" rIns="0" bIns="0" rtlCol="0" anchor="ctr"/>
-          <a:lstStyle/>
-          <a:p>
-            <a:pPr algn="ctr" indent="0" marL="0">
+          <p:cNvPr id="7" name="Text 4"/>
+          <p:cNvSpPr txBox="1"/>
+          <p:nvPr/>
+        </p:nvSpPr>
+        <p:spPr>
+          <a:xfrm>
+            <a:off x="5166360" y="1261872"/>
+            <a:ext cx="2743200" cy="320040"/>
+          </a:xfrm>
+          <a:prstGeom prst="rect">
+            <a:avLst/>
+          </a:prstGeom>
+          <a:noFill/>
+          <a:ln/>
+        </p:spPr>
+        <p:txBody>
+          <a:bodyPr wrap="square" lIns="0" tIns="0" rIns="0" bIns="0" rtlCol="0" anchor="t"/>
+          <a:lstStyle/>
+          <a:p>
+            <a:pPr indent="0" marL="0">
               <a:buNone/>
             </a:pPr>
             <a:r>
               <a:rPr lang="en-US" sz="1500" b="1" dirty="0">
                 <a:solidFill>
-                  <a:srgbClr val="FFFFFF"/>
+                  <a:srgbClr val="AD4426"/>
                 </a:solidFill>
                 <a:latin typeface="Cambria" pitchFamily="34" charset="0"/>
                 <a:ea typeface="Cambria" pitchFamily="34" charset="-122"/>
                 <a:cs typeface="Cambria" pitchFamily="34" charset="-120"/>
               </a:rPr>
+              <a:t>Die Pfeile</a:t>
+            </a:r>
+            <a:endParaRPr lang="en-US" sz="1500" dirty="0"/>
+          </a:p>
+        </p:txBody>
+      </p:sp>
+      <p:sp>
+        <p:nvSpPr>
+          <p:cNvPr id="8" name="Text 5"/>
+          <p:cNvSpPr txBox="1"/>
+          <p:nvPr/>
+        </p:nvSpPr>
+        <p:spPr>
+          <a:xfrm>
+            <a:off x="5166360" y="1691640"/>
+            <a:ext cx="329184" cy="329184"/>
+          </a:xfrm>
+          <a:prstGeom prst="ellipse">
+            <a:avLst/>
+          </a:prstGeom>
+          <a:solidFill>
+            <a:srgbClr val="AD4426"/>
+          </a:solidFill>
+          <a:ln/>
+        </p:spPr>
+        <p:txBody>
+          <a:bodyPr wrap="square" lIns="0" tIns="0" rIns="0" bIns="0" rtlCol="0" anchor="ctr"/>
+          <a:lstStyle/>
+          <a:p>
+            <a:pPr algn="ctr" indent="0" marL="0">
+              <a:buNone/>
+            </a:pPr>
+            <a:r>
+              <a:rPr lang="en-US" sz="1200" b="1" dirty="0">
+                <a:solidFill>
+                  <a:srgbClr val="FFFFFF"/>
+                </a:solidFill>
+                <a:latin typeface="Cambria" pitchFamily="34" charset="0"/>
+                <a:ea typeface="Cambria" pitchFamily="34" charset="-122"/>
+                <a:cs typeface="Cambria" pitchFamily="34" charset="-120"/>
+              </a:rPr>
               <a:t>1</a:t>
             </a:r>
-            <a:endParaRPr lang="en-US" sz="1500" dirty="0"/>
-          </a:p>
-        </p:txBody>
-      </p:sp>
-      <p:sp>
-        <p:nvSpPr>
-          <p:cNvPr id="8" name="Text 6"/>
-          <p:cNvSpPr txBox="1"/>
-          <p:nvPr/>
-        </p:nvSpPr>
-        <p:spPr>
-          <a:xfrm>
-            <a:off x="1143000" y="1783080"/>
-            <a:ext cx="3246120" cy="731520"/>
+            <a:endParaRPr lang="en-US" sz="1200" dirty="0"/>
+          </a:p>
+        </p:txBody>
+      </p:sp>
+      <p:sp>
+        <p:nvSpPr>
+          <p:cNvPr id="9" name="Text 6"/>
+          <p:cNvSpPr txBox="1"/>
+          <p:nvPr/>
+        </p:nvSpPr>
+        <p:spPr>
+          <a:xfrm>
+            <a:off x="5577840" y="1664208"/>
+            <a:ext cx="3017520" cy="457200"/>
           </a:xfrm>
           <a:prstGeom prst="rect">
             <a:avLst/>
@@ -4805,7 +5327,7 @@
               <a:buNone/>
             </a:pPr>
             <a:r>
-              <a:rPr lang="en-US" sz="1300" dirty="0">
+              <a:rPr lang="en-US" sz="1150" dirty="0">
                 <a:solidFill>
                   <a:srgbClr val="2B2318"/>
                 </a:solidFill>
@@ -4813,56 +5335,29 @@
                 <a:ea typeface="Calibri" pitchFamily="34" charset="-122"/>
                 <a:cs typeface="Calibri" pitchFamily="34" charset="-120"/>
               </a:rPr>
-              <a:t>Archont kann nur die 1. Klasse werden.</a:t>
-            </a:r>
-            <a:endParaRPr lang="en-US" sz="1300" dirty="0"/>
-          </a:p>
-        </p:txBody>
-      </p:sp>
-      <p:sp>
-        <p:nvSpPr>
-          <p:cNvPr id="9" name="Shape 7"/>
-          <p:cNvSpPr/>
-          <p:nvPr/>
-        </p:nvSpPr>
-        <p:spPr>
-          <a:xfrm>
-            <a:off x="4663440" y="1783080"/>
-            <a:ext cx="4023360" cy="731520"/>
-          </a:xfrm>
-          <a:prstGeom prst="roundRect">
-            <a:avLst>
-              <a:gd name="adj" fmla="val 10000"/>
-            </a:avLst>
+              <a:t>nur die 1. Klasse kann Archont werden</a:t>
+            </a:r>
+            <a:endParaRPr lang="en-US" sz="1150" dirty="0"/>
+          </a:p>
+        </p:txBody>
+      </p:sp>
+      <p:sp>
+        <p:nvSpPr>
+          <p:cNvPr id="10" name="Text 7"/>
+          <p:cNvSpPr txBox="1"/>
+          <p:nvPr/>
+        </p:nvSpPr>
+        <p:spPr>
+          <a:xfrm>
+            <a:off x="5166360" y="2221992"/>
+            <a:ext cx="329184" cy="329184"/>
+          </a:xfrm>
+          <a:prstGeom prst="ellipse">
+            <a:avLst/>
           </a:prstGeom>
           <a:solidFill>
-            <a:srgbClr val="F4ECDE"/>
+            <a:srgbClr val="AD4426"/>
           </a:solidFill>
-          <a:ln w="12700">
-            <a:solidFill>
-              <a:srgbClr val="F4ECDE"/>
-            </a:solidFill>
-            <a:prstDash val="solid"/>
-          </a:ln>
-        </p:spPr>
-      </p:sp>
-      <p:sp>
-        <p:nvSpPr>
-          <p:cNvPr id="10" name="Text 8"/>
-          <p:cNvSpPr txBox="1"/>
-          <p:nvPr/>
-        </p:nvSpPr>
-        <p:spPr>
-          <a:xfrm>
-            <a:off x="4800600" y="1938528"/>
-            <a:ext cx="420624" cy="420624"/>
-          </a:xfrm>
-          <a:prstGeom prst="ellipse">
-            <a:avLst/>
-          </a:prstGeom>
-          <a:solidFill>
-            <a:srgbClr val="2B2318"/>
-          </a:solidFill>
           <a:ln/>
         </p:spPr>
         <p:txBody>
@@ -4873,7 +5368,7 @@
               <a:buNone/>
             </a:pPr>
             <a:r>
-              <a:rPr lang="en-US" sz="1500" b="1" dirty="0">
+              <a:rPr lang="en-US" sz="1200" b="1" dirty="0">
                 <a:solidFill>
                   <a:srgbClr val="FFFFFF"/>
                 </a:solidFill>
@@ -4883,20 +5378,20 @@
               </a:rPr>
               <a:t>2</a:t>
             </a:r>
-            <a:endParaRPr lang="en-US" sz="1500" dirty="0"/>
-          </a:p>
-        </p:txBody>
-      </p:sp>
-      <p:sp>
-        <p:nvSpPr>
-          <p:cNvPr id="11" name="Text 9"/>
-          <p:cNvSpPr txBox="1"/>
-          <p:nvPr/>
-        </p:nvSpPr>
-        <p:spPr>
-          <a:xfrm>
-            <a:off x="5349240" y="1783080"/>
-            <a:ext cx="3246120" cy="731520"/>
+            <a:endParaRPr lang="en-US" sz="1200" dirty="0"/>
+          </a:p>
+        </p:txBody>
+      </p:sp>
+      <p:sp>
+        <p:nvSpPr>
+          <p:cNvPr id="11" name="Text 8"/>
+          <p:cNvSpPr txBox="1"/>
+          <p:nvPr/>
+        </p:nvSpPr>
+        <p:spPr>
+          <a:xfrm>
+            <a:off x="5577840" y="2194560"/>
+            <a:ext cx="3017520" cy="457200"/>
           </a:xfrm>
           <a:prstGeom prst="rect">
             <a:avLst/>
@@ -4912,7 +5407,7 @@
               <a:buNone/>
             </a:pPr>
             <a:r>
-              <a:rPr lang="en-US" sz="1300" dirty="0">
+              <a:rPr lang="en-US" sz="1150" dirty="0">
                 <a:solidFill>
                   <a:srgbClr val="2B2318"/>
                 </a:solidFill>
@@ -4920,56 +5415,29 @@
                 <a:ea typeface="Calibri" pitchFamily="34" charset="-122"/>
                 <a:cs typeface="Calibri" pitchFamily="34" charset="-120"/>
               </a:rPr>
-              <a:t>Alle Bürger über 20 stimmen in der Volksversammlung über Gesetze ab.</a:t>
-            </a:r>
-            <a:endParaRPr lang="en-US" sz="1300" dirty="0"/>
-          </a:p>
-        </p:txBody>
-      </p:sp>
-      <p:sp>
-        <p:nvSpPr>
-          <p:cNvPr id="12" name="Shape 10"/>
-          <p:cNvSpPr/>
-          <p:nvPr/>
-        </p:nvSpPr>
-        <p:spPr>
-          <a:xfrm>
-            <a:off x="457200" y="2651760"/>
-            <a:ext cx="4023360" cy="731520"/>
-          </a:xfrm>
-          <a:prstGeom prst="roundRect">
-            <a:avLst>
-              <a:gd name="adj" fmla="val 10000"/>
-            </a:avLst>
+              <a:t>die Klassen 1–3 können in den Rat gewählt werden</a:t>
+            </a:r>
+            <a:endParaRPr lang="en-US" sz="1150" dirty="0"/>
+          </a:p>
+        </p:txBody>
+      </p:sp>
+      <p:sp>
+        <p:nvSpPr>
+          <p:cNvPr id="12" name="Text 9"/>
+          <p:cNvSpPr txBox="1"/>
+          <p:nvPr/>
+        </p:nvSpPr>
+        <p:spPr>
+          <a:xfrm>
+            <a:off x="5166360" y="2752344"/>
+            <a:ext cx="329184" cy="329184"/>
+          </a:xfrm>
+          <a:prstGeom prst="ellipse">
+            <a:avLst/>
           </a:prstGeom>
           <a:solidFill>
-            <a:srgbClr val="F4ECDE"/>
+            <a:srgbClr val="AD4426"/>
           </a:solidFill>
-          <a:ln w="12700">
-            <a:solidFill>
-              <a:srgbClr val="F4ECDE"/>
-            </a:solidFill>
-            <a:prstDash val="solid"/>
-          </a:ln>
-        </p:spPr>
-      </p:sp>
-      <p:sp>
-        <p:nvSpPr>
-          <p:cNvPr id="13" name="Text 11"/>
-          <p:cNvSpPr txBox="1"/>
-          <p:nvPr/>
-        </p:nvSpPr>
-        <p:spPr>
-          <a:xfrm>
-            <a:off x="594360" y="2807208"/>
-            <a:ext cx="420624" cy="420624"/>
-          </a:xfrm>
-          <a:prstGeom prst="ellipse">
-            <a:avLst/>
-          </a:prstGeom>
-          <a:solidFill>
-            <a:srgbClr val="2B2318"/>
-          </a:solidFill>
           <a:ln/>
         </p:spPr>
         <p:txBody>
@@ -4980,7 +5448,7 @@
               <a:buNone/>
             </a:pPr>
             <a:r>
-              <a:rPr lang="en-US" sz="1500" b="1" dirty="0">
+              <a:rPr lang="en-US" sz="1200" b="1" dirty="0">
                 <a:solidFill>
                   <a:srgbClr val="FFFFFF"/>
                 </a:solidFill>
@@ -4990,20 +5458,20 @@
               </a:rPr>
               <a:t>3</a:t>
             </a:r>
-            <a:endParaRPr lang="en-US" sz="1500" dirty="0"/>
-          </a:p>
-        </p:txBody>
-      </p:sp>
-      <p:sp>
-        <p:nvSpPr>
-          <p:cNvPr id="14" name="Text 12"/>
-          <p:cNvSpPr txBox="1"/>
-          <p:nvPr/>
-        </p:nvSpPr>
-        <p:spPr>
-          <a:xfrm>
-            <a:off x="1143000" y="2651760"/>
-            <a:ext cx="3246120" cy="731520"/>
+            <a:endParaRPr lang="en-US" sz="1200" dirty="0"/>
+          </a:p>
+        </p:txBody>
+      </p:sp>
+      <p:sp>
+        <p:nvSpPr>
+          <p:cNvPr id="13" name="Text 10"/>
+          <p:cNvSpPr txBox="1"/>
+          <p:nvPr/>
+        </p:nvSpPr>
+        <p:spPr>
+          <a:xfrm>
+            <a:off x="5577840" y="2724912"/>
+            <a:ext cx="3017520" cy="457200"/>
           </a:xfrm>
           <a:prstGeom prst="rect">
             <a:avLst/>
@@ -5019,7 +5487,7 @@
               <a:buNone/>
             </a:pPr>
             <a:r>
-              <a:rPr lang="en-US" sz="1300" dirty="0">
+              <a:rPr lang="en-US" sz="1150" dirty="0">
                 <a:solidFill>
                   <a:srgbClr val="2B2318"/>
                 </a:solidFill>
@@ -5027,56 +5495,29 @@
                 <a:ea typeface="Calibri" pitchFamily="34" charset="-122"/>
                 <a:cs typeface="Calibri" pitchFamily="34" charset="-120"/>
               </a:rPr>
-              <a:t>In den Rat der 400 dürfen nur die Klassen 1–3.</a:t>
-            </a:r>
-            <a:endParaRPr lang="en-US" sz="1300" dirty="0"/>
-          </a:p>
-        </p:txBody>
-      </p:sp>
-      <p:sp>
-        <p:nvSpPr>
-          <p:cNvPr id="15" name="Shape 13"/>
-          <p:cNvSpPr/>
-          <p:nvPr/>
-        </p:nvSpPr>
-        <p:spPr>
-          <a:xfrm>
-            <a:off x="4663440" y="2651760"/>
-            <a:ext cx="4023360" cy="731520"/>
-          </a:xfrm>
-          <a:prstGeom prst="roundRect">
-            <a:avLst>
-              <a:gd name="adj" fmla="val 10000"/>
-            </a:avLst>
+              <a:t>ehemalige Archonten werden Mitglied im Areopag</a:t>
+            </a:r>
+            <a:endParaRPr lang="en-US" sz="1150" dirty="0"/>
+          </a:p>
+        </p:txBody>
+      </p:sp>
+      <p:sp>
+        <p:nvSpPr>
+          <p:cNvPr id="14" name="Text 11"/>
+          <p:cNvSpPr txBox="1"/>
+          <p:nvPr/>
+        </p:nvSpPr>
+        <p:spPr>
+          <a:xfrm>
+            <a:off x="5166360" y="3282696"/>
+            <a:ext cx="329184" cy="329184"/>
+          </a:xfrm>
+          <a:prstGeom prst="ellipse">
+            <a:avLst/>
           </a:prstGeom>
           <a:solidFill>
-            <a:srgbClr val="F4ECDE"/>
+            <a:srgbClr val="AD4426"/>
           </a:solidFill>
-          <a:ln w="12700">
-            <a:solidFill>
-              <a:srgbClr val="F4ECDE"/>
-            </a:solidFill>
-            <a:prstDash val="solid"/>
-          </a:ln>
-        </p:spPr>
-      </p:sp>
-      <p:sp>
-        <p:nvSpPr>
-          <p:cNvPr id="16" name="Text 14"/>
-          <p:cNvSpPr txBox="1"/>
-          <p:nvPr/>
-        </p:nvSpPr>
-        <p:spPr>
-          <a:xfrm>
-            <a:off x="4800600" y="2807208"/>
-            <a:ext cx="420624" cy="420624"/>
-          </a:xfrm>
-          <a:prstGeom prst="ellipse">
-            <a:avLst/>
-          </a:prstGeom>
-          <a:solidFill>
-            <a:srgbClr val="2B2318"/>
-          </a:solidFill>
           <a:ln/>
         </p:spPr>
         <p:txBody>
@@ -5087,7 +5528,7 @@
               <a:buNone/>
             </a:pPr>
             <a:r>
-              <a:rPr lang="en-US" sz="1500" b="1" dirty="0">
+              <a:rPr lang="en-US" sz="1200" b="1" dirty="0">
                 <a:solidFill>
                   <a:srgbClr val="FFFFFF"/>
                 </a:solidFill>
@@ -5097,20 +5538,20 @@
               </a:rPr>
               <a:t>4</a:t>
             </a:r>
-            <a:endParaRPr lang="en-US" sz="1500" dirty="0"/>
-          </a:p>
-        </p:txBody>
-      </p:sp>
-      <p:sp>
-        <p:nvSpPr>
-          <p:cNvPr id="17" name="Text 15"/>
-          <p:cNvSpPr txBox="1"/>
-          <p:nvPr/>
-        </p:nvSpPr>
-        <p:spPr>
-          <a:xfrm>
-            <a:off x="5349240" y="2651760"/>
-            <a:ext cx="3246120" cy="731520"/>
+            <a:endParaRPr lang="en-US" sz="1200" dirty="0"/>
+          </a:p>
+        </p:txBody>
+      </p:sp>
+      <p:sp>
+        <p:nvSpPr>
+          <p:cNvPr id="15" name="Text 12"/>
+          <p:cNvSpPr txBox="1"/>
+          <p:nvPr/>
+        </p:nvSpPr>
+        <p:spPr>
+          <a:xfrm>
+            <a:off x="5577840" y="3255264"/>
+            <a:ext cx="3017520" cy="457200"/>
           </a:xfrm>
           <a:prstGeom prst="rect">
             <a:avLst/>
@@ -5126,7 +5567,7 @@
               <a:buNone/>
             </a:pPr>
             <a:r>
-              <a:rPr lang="en-US" sz="1300" dirty="0">
+              <a:rPr lang="en-US" sz="1150" dirty="0">
                 <a:solidFill>
                   <a:srgbClr val="2B2318"/>
                 </a:solidFill>
@@ -5134,56 +5575,29 @@
                 <a:ea typeface="Calibri" pitchFamily="34" charset="-122"/>
                 <a:cs typeface="Calibri" pitchFamily="34" charset="-120"/>
               </a:rPr>
-              <a:t>Jeder Bürger darf vor Gericht klagen.</a:t>
-            </a:r>
-            <a:endParaRPr lang="en-US" sz="1300" dirty="0"/>
-          </a:p>
-        </p:txBody>
-      </p:sp>
-      <p:sp>
-        <p:nvSpPr>
-          <p:cNvPr id="18" name="Shape 16"/>
-          <p:cNvSpPr/>
-          <p:nvPr/>
-        </p:nvSpPr>
-        <p:spPr>
-          <a:xfrm>
-            <a:off x="457200" y="3520440"/>
-            <a:ext cx="4023360" cy="731520"/>
-          </a:xfrm>
-          <a:prstGeom prst="roundRect">
-            <a:avLst>
-              <a:gd name="adj" fmla="val 10000"/>
-            </a:avLst>
+              <a:t>die Volksversammlung wählt die Beamten</a:t>
+            </a:r>
+            <a:endParaRPr lang="en-US" sz="1150" dirty="0"/>
+          </a:p>
+        </p:txBody>
+      </p:sp>
+      <p:sp>
+        <p:nvSpPr>
+          <p:cNvPr id="16" name="Text 13"/>
+          <p:cNvSpPr txBox="1"/>
+          <p:nvPr/>
+        </p:nvSpPr>
+        <p:spPr>
+          <a:xfrm>
+            <a:off x="5166360" y="3813048"/>
+            <a:ext cx="329184" cy="329184"/>
+          </a:xfrm>
+          <a:prstGeom prst="ellipse">
+            <a:avLst/>
           </a:prstGeom>
           <a:solidFill>
-            <a:srgbClr val="F4ECDE"/>
+            <a:srgbClr val="AD4426"/>
           </a:solidFill>
-          <a:ln w="12700">
-            <a:solidFill>
-              <a:srgbClr val="F4ECDE"/>
-            </a:solidFill>
-            <a:prstDash val="solid"/>
-          </a:ln>
-        </p:spPr>
-      </p:sp>
-      <p:sp>
-        <p:nvSpPr>
-          <p:cNvPr id="19" name="Text 17"/>
-          <p:cNvSpPr txBox="1"/>
-          <p:nvPr/>
-        </p:nvSpPr>
-        <p:spPr>
-          <a:xfrm>
-            <a:off x="594360" y="3675888"/>
-            <a:ext cx="420624" cy="420624"/>
-          </a:xfrm>
-          <a:prstGeom prst="ellipse">
-            <a:avLst/>
-          </a:prstGeom>
-          <a:solidFill>
-            <a:srgbClr val="2B2318"/>
-          </a:solidFill>
           <a:ln/>
         </p:spPr>
         <p:txBody>
@@ -5194,7 +5608,7 @@
               <a:buNone/>
             </a:pPr>
             <a:r>
-              <a:rPr lang="en-US" sz="1500" b="1" dirty="0">
+              <a:rPr lang="en-US" sz="1200" b="1" dirty="0">
                 <a:solidFill>
                   <a:srgbClr val="FFFFFF"/>
                 </a:solidFill>
@@ -5204,20 +5618,20 @@
               </a:rPr>
               <a:t>5</a:t>
             </a:r>
-            <a:endParaRPr lang="en-US" sz="1500" dirty="0"/>
-          </a:p>
-        </p:txBody>
-      </p:sp>
-      <p:sp>
-        <p:nvSpPr>
-          <p:cNvPr id="20" name="Text 18"/>
-          <p:cNvSpPr txBox="1"/>
-          <p:nvPr/>
-        </p:nvSpPr>
-        <p:spPr>
-          <a:xfrm>
-            <a:off x="1143000" y="3520440"/>
-            <a:ext cx="3246120" cy="731520"/>
+            <a:endParaRPr lang="en-US" sz="1200" dirty="0"/>
+          </a:p>
+        </p:txBody>
+      </p:sp>
+      <p:sp>
+        <p:nvSpPr>
+          <p:cNvPr id="17" name="Text 14"/>
+          <p:cNvSpPr txBox="1"/>
+          <p:nvPr/>
+        </p:nvSpPr>
+        <p:spPr>
+          <a:xfrm>
+            <a:off x="5577840" y="3785616"/>
+            <a:ext cx="3017520" cy="457200"/>
           </a:xfrm>
           <a:prstGeom prst="rect">
             <a:avLst/>
@@ -5233,7 +5647,7 @@
               <a:buNone/>
             </a:pPr>
             <a:r>
-              <a:rPr lang="en-US" sz="1300" dirty="0">
+              <a:rPr lang="en-US" sz="1150" dirty="0">
                 <a:solidFill>
                   <a:srgbClr val="2B2318"/>
                 </a:solidFill>
@@ -5241,122 +5655,54 @@
                 <a:ea typeface="Calibri" pitchFamily="34" charset="-122"/>
                 <a:cs typeface="Calibri" pitchFamily="34" charset="-120"/>
               </a:rPr>
-              <a:t>Der Areopag besteht aus ehemaligen Archonten.</a:t>
-            </a:r>
-            <a:endParaRPr lang="en-US" sz="1300" dirty="0"/>
-          </a:p>
-        </p:txBody>
-      </p:sp>
-      <p:sp>
-        <p:nvSpPr>
-          <p:cNvPr id="21" name="Shape 19"/>
-          <p:cNvSpPr/>
-          <p:nvPr/>
-        </p:nvSpPr>
-        <p:spPr>
-          <a:xfrm>
-            <a:off x="4663440" y="3520440"/>
-            <a:ext cx="4023360" cy="731520"/>
-          </a:xfrm>
-          <a:prstGeom prst="roundRect">
-            <a:avLst>
-              <a:gd name="adj" fmla="val 10000"/>
-            </a:avLst>
-          </a:prstGeom>
-          <a:solidFill>
-            <a:srgbClr val="F4ECDE"/>
-          </a:solidFill>
-          <a:ln w="12700">
-            <a:solidFill>
-              <a:srgbClr val="F4ECDE"/>
-            </a:solidFill>
-            <a:prstDash val="solid"/>
-          </a:ln>
-        </p:spPr>
-      </p:sp>
-      <p:sp>
-        <p:nvSpPr>
-          <p:cNvPr id="22" name="Text 20"/>
-          <p:cNvSpPr txBox="1"/>
-          <p:nvPr/>
-        </p:nvSpPr>
-        <p:spPr>
-          <a:xfrm>
-            <a:off x="4800600" y="3675888"/>
-            <a:ext cx="420624" cy="420624"/>
-          </a:xfrm>
-          <a:prstGeom prst="ellipse">
-            <a:avLst/>
-          </a:prstGeom>
-          <a:solidFill>
-            <a:srgbClr val="2B2318"/>
-          </a:solidFill>
-          <a:ln/>
-        </p:spPr>
-        <p:txBody>
-          <a:bodyPr wrap="square" lIns="0" tIns="0" rIns="0" bIns="0" rtlCol="0" anchor="ctr"/>
-          <a:lstStyle/>
-          <a:p>
-            <a:pPr algn="ctr" indent="0" marL="0">
-              <a:buNone/>
-            </a:pPr>
-            <a:r>
-              <a:rPr lang="en-US" sz="1500" b="1" dirty="0">
-                <a:solidFill>
-                  <a:srgbClr val="FFFFFF"/>
-                </a:solidFill>
-                <a:latin typeface="Cambria" pitchFamily="34" charset="0"/>
-                <a:ea typeface="Cambria" pitchFamily="34" charset="-122"/>
-                <a:cs typeface="Cambria" pitchFamily="34" charset="-120"/>
-              </a:rPr>
-              <a:t>6</a:t>
-            </a:r>
-            <a:endParaRPr lang="en-US" sz="1500" dirty="0"/>
-          </a:p>
-        </p:txBody>
-      </p:sp>
-      <p:sp>
-        <p:nvSpPr>
-          <p:cNvPr id="23" name="Text 21"/>
-          <p:cNvSpPr txBox="1"/>
-          <p:nvPr/>
-        </p:nvSpPr>
-        <p:spPr>
-          <a:xfrm>
-            <a:off x="5349240" y="3520440"/>
-            <a:ext cx="3246120" cy="731520"/>
-          </a:xfrm>
-          <a:prstGeom prst="rect">
-            <a:avLst/>
-          </a:prstGeom>
-          <a:noFill/>
-          <a:ln/>
-        </p:spPr>
-        <p:txBody>
-          <a:bodyPr wrap="square" lIns="0" tIns="0" rIns="0" bIns="0" rtlCol="0" anchor="ctr"/>
+              <a:t>der Rat der 400 bereitet die Gesetze vor</a:t>
+            </a:r>
+            <a:endParaRPr lang="en-US" sz="1150" dirty="0"/>
+          </a:p>
+        </p:txBody>
+      </p:sp>
+      <p:sp>
+        <p:nvSpPr>
+          <p:cNvPr id="18" name="Text 15"/>
+          <p:cNvSpPr txBox="1"/>
+          <p:nvPr/>
+        </p:nvSpPr>
+        <p:spPr>
+          <a:xfrm>
+            <a:off x="457200" y="4462272"/>
+            <a:ext cx="4114800" cy="228600"/>
+          </a:xfrm>
+          <a:prstGeom prst="rect">
+            <a:avLst/>
+          </a:prstGeom>
+          <a:noFill/>
+          <a:ln/>
+        </p:spPr>
+        <p:txBody>
+          <a:bodyPr wrap="square" lIns="0" tIns="0" rIns="0" bIns="0" rtlCol="0" anchor="t"/>
           <a:lstStyle/>
           <a:p>
             <a:pPr indent="0" marL="0">
               <a:buNone/>
             </a:pPr>
             <a:r>
-              <a:rPr lang="en-US" sz="1300" dirty="0">
-                <a:solidFill>
-                  <a:srgbClr val="2B2318"/>
+              <a:rPr lang="en-US" sz="1100" b="1" dirty="0">
+                <a:solidFill>
+                  <a:srgbClr val="5A5044"/>
                 </a:solidFill>
                 <a:latin typeface="Calibri" pitchFamily="34" charset="0"/>
                 <a:ea typeface="Calibri" pitchFamily="34" charset="-122"/>
                 <a:cs typeface="Calibri" pitchFamily="34" charset="-120"/>
               </a:rPr>
-              <a:t>Auch die Theten wählen die Beamten.</a:t>
-            </a:r>
-            <a:endParaRPr lang="en-US" sz="1300" dirty="0"/>
-          </a:p>
-        </p:txBody>
-      </p:sp>
-      <p:sp>
-        <p:nvSpPr>
-          <p:cNvPr id="24" name="Text 22"/>
+              <a:t>Lykon: grün = darf, rot = darf nicht</a:t>
+            </a:r>
+            <a:endParaRPr lang="en-US" sz="1100" dirty="0"/>
+          </a:p>
+        </p:txBody>
+      </p:sp>
+      <p:sp>
+        <p:nvSpPr>
+          <p:cNvPr id="19" name="Text 16"/>
           <p:cNvSpPr txBox="1"/>
           <p:nvPr/>
         </p:nvSpPr>
@@ -5395,7 +5741,7 @@
       </p:sp>
       <p:sp>
         <p:nvSpPr>
-          <p:cNvPr id="25" name="Text 23"/>
+          <p:cNvPr id="20" name="Text 17"/>
           <p:cNvSpPr txBox="1"/>
           <p:nvPr/>
         </p:nvSpPr>
@@ -5446,7 +5792,7 @@
     <p:bg>
       <p:bgPr>
         <a:solidFill>
-          <a:srgbClr val="FFFFFF"/>
+          <a:srgbClr val="2B2318"/>
         </a:solidFill>
       </p:bgPr>
     </p:bg>
@@ -5491,13 +5837,13 @@
             <a:r>
               <a:rPr lang="en-US" sz="1100" b="1" spc="200" kern="0" dirty="0">
                 <a:solidFill>
-                  <a:srgbClr val="AD4426"/>
+                  <a:srgbClr val="D9A441"/>
                 </a:solidFill>
                 <a:latin typeface="Calibri" pitchFamily="34" charset="0"/>
                 <a:ea typeface="Calibri" pitchFamily="34" charset="-122"/>
                 <a:cs typeface="Calibri" pitchFamily="34" charset="-120"/>
               </a:rPr>
-              <a:t>AUFLÖSUNG</a:t>
+              <a:t>ALLE LEGEN SICH FEST</a:t>
             </a:r>
             <a:endParaRPr lang="en-US" sz="1100" dirty="0"/>
           </a:p>
@@ -5530,13 +5876,13 @@
             <a:r>
               <a:rPr lang="en-US" sz="2800" b="1" dirty="0">
                 <a:solidFill>
-                  <a:srgbClr val="2B2318"/>
+                  <a:srgbClr val="FFFFFF"/>
                 </a:solidFill>
                 <a:latin typeface="Cambria" pitchFamily="34" charset="0"/>
                 <a:ea typeface="Cambria" pitchFamily="34" charset="-122"/>
                 <a:cs typeface="Cambria" pitchFamily="34" charset="-120"/>
               </a:rPr>
-              <a:t>Beides!</a:t>
+              <a:t>Ist Solons Verfassung eine Demokratie?</a:t>
             </a:r>
             <a:endParaRPr lang="en-US" sz="2800" dirty="0"/>
           </a:p>
@@ -5579,7 +5925,7 @@
                 <a:ea typeface="Calibri" pitchFamily="34" charset="-122"/>
                 <a:cs typeface="Calibri" pitchFamily="34" charset="-120"/>
               </a:rPr>
-              <a:t>Auflösung</a:t>
+              <a:t>1 Min.</a:t>
             </a:r>
             <a:endParaRPr lang="en-US" sz="1100" dirty="0"/>
           </a:p>
@@ -5593,20 +5939,20 @@
         </p:nvSpPr>
         <p:spPr>
           <a:xfrm>
-            <a:off x="457200" y="1188720"/>
-            <a:ext cx="4023360" cy="2377440"/>
+            <a:off x="457200" y="1463040"/>
+            <a:ext cx="8229600" cy="1463040"/>
           </a:xfrm>
           <a:prstGeom prst="roundRect">
             <a:avLst>
-              <a:gd name="adj" fmla="val 3077"/>
+              <a:gd name="adj" fmla="val 5000"/>
             </a:avLst>
           </a:prstGeom>
           <a:solidFill>
-            <a:srgbClr val="F4ECDE"/>
+            <a:srgbClr val="3A3024"/>
           </a:solidFill>
           <a:ln w="12700">
             <a:solidFill>
-              <a:srgbClr val="F4ECDE"/>
+              <a:srgbClr val="3A3024"/>
             </a:solidFill>
             <a:prstDash val="solid"/>
           </a:ln>
@@ -5620,8 +5966,8 @@
         </p:nvSpPr>
         <p:spPr>
           <a:xfrm>
-            <a:off x="685800" y="1261872"/>
-            <a:ext cx="3566160" cy="365760"/>
+            <a:off x="731520" y="1554480"/>
+            <a:ext cx="7680960" cy="457200"/>
           </a:xfrm>
           <a:prstGeom prst="rect">
             <a:avLst/>
@@ -5637,442 +5983,62 @@
               <a:buNone/>
             </a:pPr>
             <a:r>
-              <a:rPr lang="en-US" sz="1900" b="1" dirty="0">
-                <a:solidFill>
-                  <a:srgbClr val="3C783C"/>
+              <a:rPr lang="en-US" sz="1600" dirty="0">
+                <a:solidFill>
+                  <a:srgbClr val="E8DFD0"/>
+                </a:solidFill>
+                <a:latin typeface="Calibri" pitchFamily="34" charset="0"/>
+                <a:ea typeface="Calibri" pitchFamily="34" charset="-122"/>
+                <a:cs typeface="Calibri" pitchFamily="34" charset="-120"/>
+              </a:rPr>
+              <a:t>Denk an „Geld statt Blut“ und an eure Anfragen. Zeige auf mein Zeichen:</a:t>
+            </a:r>
+            <a:endParaRPr lang="en-US" sz="1600" dirty="0"/>
+          </a:p>
+        </p:txBody>
+      </p:sp>
+      <p:sp>
+        <p:nvSpPr>
+          <p:cNvPr id="7" name="Text 5"/>
+          <p:cNvSpPr txBox="1"/>
+          <p:nvPr/>
+        </p:nvSpPr>
+        <p:spPr>
+          <a:xfrm>
+            <a:off x="731520" y="2057400"/>
+            <a:ext cx="7680960" cy="640080"/>
+          </a:xfrm>
+          <a:prstGeom prst="rect">
+            <a:avLst/>
+          </a:prstGeom>
+          <a:noFill/>
+          <a:ln/>
+        </p:spPr>
+        <p:txBody>
+          <a:bodyPr wrap="square" lIns="0" tIns="0" rIns="0" bIns="0" rtlCol="0" anchor="t"/>
+          <a:lstStyle/>
+          <a:p>
+            <a:pPr indent="0" marL="0">
+              <a:buNone/>
+            </a:pPr>
+            <a:r>
+              <a:rPr lang="en-US" sz="2000" b="1" dirty="0">
+                <a:solidFill>
+                  <a:srgbClr val="FFFFFF"/>
                 </a:solidFill>
                 <a:latin typeface="Cambria" pitchFamily="34" charset="0"/>
                 <a:ea typeface="Cambria" pitchFamily="34" charset="-122"/>
                 <a:cs typeface="Cambria" pitchFamily="34" charset="-120"/>
               </a:rPr>
-              <a:t>demokratisch</a:t>
-            </a:r>
-            <a:endParaRPr lang="en-US" sz="1900" dirty="0"/>
-          </a:p>
-        </p:txBody>
-      </p:sp>
-      <p:sp>
-        <p:nvSpPr>
-          <p:cNvPr id="7" name="Text 5"/>
-          <p:cNvSpPr txBox="1"/>
-          <p:nvPr/>
-        </p:nvSpPr>
-        <p:spPr>
-          <a:xfrm>
-            <a:off x="685800" y="1627632"/>
-            <a:ext cx="3566160" cy="256032"/>
-          </a:xfrm>
-          <a:prstGeom prst="rect">
-            <a:avLst/>
-          </a:prstGeom>
-          <a:noFill/>
-          <a:ln/>
-        </p:spPr>
-        <p:txBody>
-          <a:bodyPr wrap="square" lIns="0" tIns="0" rIns="0" bIns="0" rtlCol="0" anchor="t"/>
-          <a:lstStyle/>
-          <a:p>
-            <a:pPr indent="0" marL="0">
-              <a:buNone/>
-            </a:pPr>
-            <a:r>
-              <a:rPr lang="en-US" sz="1100" i="1" dirty="0">
-                <a:solidFill>
-                  <a:srgbClr val="5A5044"/>
-                </a:solidFill>
-                <a:latin typeface="Calibri" pitchFamily="34" charset="0"/>
-                <a:ea typeface="Calibri" pitchFamily="34" charset="-122"/>
-                <a:cs typeface="Calibri" pitchFamily="34" charset="-120"/>
-              </a:rPr>
-              <a:t>das Volk entscheidet</a:t>
-            </a:r>
-            <a:endParaRPr lang="en-US" sz="1100" dirty="0"/>
+              <a:t>Daumen hoch = Ja      Daumen runter = Nein</a:t>
+            </a:r>
+            <a:endParaRPr lang="en-US" sz="2000" dirty="0"/>
           </a:p>
         </p:txBody>
       </p:sp>
       <p:sp>
         <p:nvSpPr>
           <p:cNvPr id="8" name="Text 6"/>
-          <p:cNvSpPr txBox="1"/>
-          <p:nvPr/>
-        </p:nvSpPr>
-        <p:spPr>
-          <a:xfrm>
-            <a:off x="685800" y="1965960"/>
-            <a:ext cx="3611880" cy="1554480"/>
-          </a:xfrm>
-          <a:prstGeom prst="rect">
-            <a:avLst/>
-          </a:prstGeom>
-          <a:noFill/>
-          <a:ln/>
-        </p:spPr>
-        <p:txBody>
-          <a:bodyPr wrap="square" lIns="0" tIns="0" rIns="0" bIns="0" rtlCol="0" anchor="t"/>
-          <a:lstStyle/>
-          <a:p>
-            <a:pPr marL="342900" indent="-342900">
-              <a:spcAft>
-                <a:spcPts val="600"/>
-              </a:spcAft>
-              <a:buSzPct val="100000"/>
-              <a:buChar char="•"/>
-            </a:pPr>
-            <a:r>
-              <a:rPr lang="en-US" sz="1300" dirty="0">
-                <a:solidFill>
-                  <a:srgbClr val="2B2318"/>
-                </a:solidFill>
-                <a:latin typeface="Calibri" pitchFamily="34" charset="0"/>
-                <a:ea typeface="Calibri" pitchFamily="34" charset="-122"/>
-                <a:cs typeface="Calibri" pitchFamily="34" charset="-120"/>
-              </a:rPr>
-              <a:t>Alle Bürger über 20 stimmen in der Volksversammlung über Gesetze ab.</a:t>
-            </a:r>
-            <a:endParaRPr lang="en-US" sz="1300" dirty="0"/>
-          </a:p>
-          <a:p>
-            <a:pPr marL="342900" indent="-342900">
-              <a:spcAft>
-                <a:spcPts val="600"/>
-              </a:spcAft>
-              <a:buSzPct val="100000"/>
-              <a:buChar char="•"/>
-            </a:pPr>
-            <a:r>
-              <a:rPr lang="en-US" sz="1300" dirty="0">
-                <a:solidFill>
-                  <a:srgbClr val="2B2318"/>
-                </a:solidFill>
-                <a:latin typeface="Calibri" pitchFamily="34" charset="0"/>
-                <a:ea typeface="Calibri" pitchFamily="34" charset="-122"/>
-                <a:cs typeface="Calibri" pitchFamily="34" charset="-120"/>
-              </a:rPr>
-              <a:t>Jeder Bürger darf vor Gericht klagen.</a:t>
-            </a:r>
-            <a:endParaRPr lang="en-US" sz="1300" dirty="0"/>
-          </a:p>
-          <a:p>
-            <a:pPr marL="342900" indent="-342900">
-              <a:spcAft>
-                <a:spcPts val="600"/>
-              </a:spcAft>
-              <a:buSzPct val="100000"/>
-              <a:buChar char="•"/>
-            </a:pPr>
-            <a:r>
-              <a:rPr lang="en-US" sz="1300" dirty="0">
-                <a:solidFill>
-                  <a:srgbClr val="2B2318"/>
-                </a:solidFill>
-                <a:latin typeface="Calibri" pitchFamily="34" charset="0"/>
-                <a:ea typeface="Calibri" pitchFamily="34" charset="-122"/>
-                <a:cs typeface="Calibri" pitchFamily="34" charset="-120"/>
-              </a:rPr>
-              <a:t>Auch die Theten wählen die Beamten.</a:t>
-            </a:r>
-            <a:endParaRPr lang="en-US" sz="1300" dirty="0"/>
-          </a:p>
-        </p:txBody>
-      </p:sp>
-      <p:sp>
-        <p:nvSpPr>
-          <p:cNvPr id="9" name="Shape 7"/>
-          <p:cNvSpPr/>
-          <p:nvPr/>
-        </p:nvSpPr>
-        <p:spPr>
-          <a:xfrm>
-            <a:off x="4663440" y="1188720"/>
-            <a:ext cx="4023360" cy="2377440"/>
-          </a:xfrm>
-          <a:prstGeom prst="roundRect">
-            <a:avLst>
-              <a:gd name="adj" fmla="val 3077"/>
-            </a:avLst>
-          </a:prstGeom>
-          <a:solidFill>
-            <a:srgbClr val="F4ECDE"/>
-          </a:solidFill>
-          <a:ln w="12700">
-            <a:solidFill>
-              <a:srgbClr val="F4ECDE"/>
-            </a:solidFill>
-            <a:prstDash val="solid"/>
-          </a:ln>
-        </p:spPr>
-      </p:sp>
-      <p:sp>
-        <p:nvSpPr>
-          <p:cNvPr id="10" name="Text 8"/>
-          <p:cNvSpPr txBox="1"/>
-          <p:nvPr/>
-        </p:nvSpPr>
-        <p:spPr>
-          <a:xfrm>
-            <a:off x="4892040" y="1261872"/>
-            <a:ext cx="3566160" cy="365760"/>
-          </a:xfrm>
-          <a:prstGeom prst="rect">
-            <a:avLst/>
-          </a:prstGeom>
-          <a:noFill/>
-          <a:ln/>
-        </p:spPr>
-        <p:txBody>
-          <a:bodyPr wrap="square" lIns="0" tIns="0" rIns="0" bIns="0" rtlCol="0" anchor="t"/>
-          <a:lstStyle/>
-          <a:p>
-            <a:pPr indent="0" marL="0">
-              <a:buNone/>
-            </a:pPr>
-            <a:r>
-              <a:rPr lang="en-US" sz="1900" b="1" dirty="0">
-                <a:solidFill>
-                  <a:srgbClr val="AD4426"/>
-                </a:solidFill>
-                <a:latin typeface="Cambria" pitchFamily="34" charset="0"/>
-                <a:ea typeface="Cambria" pitchFamily="34" charset="-122"/>
-                <a:cs typeface="Cambria" pitchFamily="34" charset="-120"/>
-              </a:rPr>
-              <a:t>timokratisch</a:t>
-            </a:r>
-            <a:endParaRPr lang="en-US" sz="1900" dirty="0"/>
-          </a:p>
-        </p:txBody>
-      </p:sp>
-      <p:sp>
-        <p:nvSpPr>
-          <p:cNvPr id="11" name="Text 9"/>
-          <p:cNvSpPr txBox="1"/>
-          <p:nvPr/>
-        </p:nvSpPr>
-        <p:spPr>
-          <a:xfrm>
-            <a:off x="4892040" y="1627632"/>
-            <a:ext cx="3566160" cy="256032"/>
-          </a:xfrm>
-          <a:prstGeom prst="rect">
-            <a:avLst/>
-          </a:prstGeom>
-          <a:noFill/>
-          <a:ln/>
-        </p:spPr>
-        <p:txBody>
-          <a:bodyPr wrap="square" lIns="0" tIns="0" rIns="0" bIns="0" rtlCol="0" anchor="t"/>
-          <a:lstStyle/>
-          <a:p>
-            <a:pPr indent="0" marL="0">
-              <a:buNone/>
-            </a:pPr>
-            <a:r>
-              <a:rPr lang="en-US" sz="1100" i="1" dirty="0">
-                <a:solidFill>
-                  <a:srgbClr val="5A5044"/>
-                </a:solidFill>
-                <a:latin typeface="Calibri" pitchFamily="34" charset="0"/>
-                <a:ea typeface="Calibri" pitchFamily="34" charset="-122"/>
-                <a:cs typeface="Calibri" pitchFamily="34" charset="-120"/>
-              </a:rPr>
-              <a:t>der Besitz entscheidet</a:t>
-            </a:r>
-            <a:endParaRPr lang="en-US" sz="1100" dirty="0"/>
-          </a:p>
-        </p:txBody>
-      </p:sp>
-      <p:sp>
-        <p:nvSpPr>
-          <p:cNvPr id="12" name="Text 10"/>
-          <p:cNvSpPr txBox="1"/>
-          <p:nvPr/>
-        </p:nvSpPr>
-        <p:spPr>
-          <a:xfrm>
-            <a:off x="4892040" y="1965960"/>
-            <a:ext cx="3611880" cy="1554480"/>
-          </a:xfrm>
-          <a:prstGeom prst="rect">
-            <a:avLst/>
-          </a:prstGeom>
-          <a:noFill/>
-          <a:ln/>
-        </p:spPr>
-        <p:txBody>
-          <a:bodyPr wrap="square" lIns="0" tIns="0" rIns="0" bIns="0" rtlCol="0" anchor="t"/>
-          <a:lstStyle/>
-          <a:p>
-            <a:pPr marL="342900" indent="-342900">
-              <a:spcAft>
-                <a:spcPts val="600"/>
-              </a:spcAft>
-              <a:buSzPct val="100000"/>
-              <a:buChar char="•"/>
-            </a:pPr>
-            <a:r>
-              <a:rPr lang="en-US" sz="1300" dirty="0">
-                <a:solidFill>
-                  <a:srgbClr val="2B2318"/>
-                </a:solidFill>
-                <a:latin typeface="Calibri" pitchFamily="34" charset="0"/>
-                <a:ea typeface="Calibri" pitchFamily="34" charset="-122"/>
-                <a:cs typeface="Calibri" pitchFamily="34" charset="-120"/>
-              </a:rPr>
-              <a:t>Archont kann nur die 1. Klasse werden.</a:t>
-            </a:r>
-            <a:endParaRPr lang="en-US" sz="1300" dirty="0"/>
-          </a:p>
-          <a:p>
-            <a:pPr marL="342900" indent="-342900">
-              <a:spcAft>
-                <a:spcPts val="600"/>
-              </a:spcAft>
-              <a:buSzPct val="100000"/>
-              <a:buChar char="•"/>
-            </a:pPr>
-            <a:r>
-              <a:rPr lang="en-US" sz="1300" dirty="0">
-                <a:solidFill>
-                  <a:srgbClr val="2B2318"/>
-                </a:solidFill>
-                <a:latin typeface="Calibri" pitchFamily="34" charset="0"/>
-                <a:ea typeface="Calibri" pitchFamily="34" charset="-122"/>
-                <a:cs typeface="Calibri" pitchFamily="34" charset="-120"/>
-              </a:rPr>
-              <a:t>In den Rat der 400 dürfen nur die Klassen 1–3.</a:t>
-            </a:r>
-            <a:endParaRPr lang="en-US" sz="1300" dirty="0"/>
-          </a:p>
-          <a:p>
-            <a:pPr marL="342900" indent="-342900">
-              <a:spcAft>
-                <a:spcPts val="600"/>
-              </a:spcAft>
-              <a:buSzPct val="100000"/>
-              <a:buChar char="•"/>
-            </a:pPr>
-            <a:r>
-              <a:rPr lang="en-US" sz="1300" dirty="0">
-                <a:solidFill>
-                  <a:srgbClr val="2B2318"/>
-                </a:solidFill>
-                <a:latin typeface="Calibri" pitchFamily="34" charset="0"/>
-                <a:ea typeface="Calibri" pitchFamily="34" charset="-122"/>
-                <a:cs typeface="Calibri" pitchFamily="34" charset="-120"/>
-              </a:rPr>
-              <a:t>Der Areopag besteht aus ehemaligen Archonten.</a:t>
-            </a:r>
-            <a:endParaRPr lang="en-US" sz="1300" dirty="0"/>
-          </a:p>
-        </p:txBody>
-      </p:sp>
-      <p:sp>
-        <p:nvSpPr>
-          <p:cNvPr id="13" name="Shape 11"/>
-          <p:cNvSpPr/>
-          <p:nvPr/>
-        </p:nvSpPr>
-        <p:spPr>
-          <a:xfrm>
-            <a:off x="457200" y="3703320"/>
-            <a:ext cx="8229600" cy="749808"/>
-          </a:xfrm>
-          <a:prstGeom prst="roundRect">
-            <a:avLst>
-              <a:gd name="adj" fmla="val 9756"/>
-            </a:avLst>
-          </a:prstGeom>
-          <a:solidFill>
-            <a:srgbClr val="2B2318"/>
-          </a:solidFill>
-          <a:ln w="12700">
-            <a:solidFill>
-              <a:srgbClr val="2B2318"/>
-            </a:solidFill>
-            <a:prstDash val="solid"/>
-          </a:ln>
-        </p:spPr>
-      </p:sp>
-      <p:sp>
-        <p:nvSpPr>
-          <p:cNvPr id="14" name="Text 12"/>
-          <p:cNvSpPr txBox="1"/>
-          <p:nvPr/>
-        </p:nvSpPr>
-        <p:spPr>
-          <a:xfrm>
-            <a:off x="685800" y="3703320"/>
-            <a:ext cx="7772400" cy="749808"/>
-          </a:xfrm>
-          <a:prstGeom prst="rect">
-            <a:avLst/>
-          </a:prstGeom>
-          <a:noFill/>
-          <a:ln/>
-        </p:spPr>
-        <p:txBody>
-          <a:bodyPr wrap="square" lIns="0" tIns="0" rIns="0" bIns="0" rtlCol="0" anchor="ctr"/>
-          <a:lstStyle/>
-          <a:p>
-            <a:pPr indent="0" marL="0">
-              <a:buNone/>
-            </a:pPr>
-            <a:r>
-              <a:rPr lang="en-US" sz="1350" b="1" dirty="0">
-                <a:solidFill>
-                  <a:srgbClr val="FFFFFF"/>
-                </a:solidFill>
-                <a:latin typeface="Calibri" pitchFamily="34" charset="0"/>
-                <a:ea typeface="Calibri" pitchFamily="34" charset="-122"/>
-                <a:cs typeface="Calibri" pitchFamily="34" charset="-120"/>
-              </a:rPr>
-              <a:t>Solons Verfassung ist beides: Beim Entscheiden redet das Volk mit, die Ämter bleiben den Reichen. Was müsste sich ändern, damit Athen eine Demokratie wird?</a:t>
-            </a:r>
-            <a:endParaRPr lang="en-US" sz="1350" dirty="0"/>
-          </a:p>
-        </p:txBody>
-      </p:sp>
-      <p:sp>
-        <p:nvSpPr>
-          <p:cNvPr id="15" name="Text 13"/>
-          <p:cNvSpPr txBox="1"/>
-          <p:nvPr/>
-        </p:nvSpPr>
-        <p:spPr>
-          <a:xfrm>
-            <a:off x="457200" y="4754880"/>
-            <a:ext cx="4572000" cy="182880"/>
-          </a:xfrm>
-          <a:prstGeom prst="rect">
-            <a:avLst/>
-          </a:prstGeom>
-          <a:noFill/>
-          <a:ln/>
-        </p:spPr>
-        <p:txBody>
-          <a:bodyPr wrap="square" lIns="0" tIns="0" rIns="0" bIns="0" rtlCol="0" anchor="t"/>
-          <a:lstStyle/>
-          <a:p>
-            <a:pPr indent="0" marL="0">
-              <a:buNone/>
-            </a:pPr>
-            <a:r>
-              <a:rPr lang="en-US" sz="900" dirty="0">
-                <a:solidFill>
-                  <a:srgbClr val="998C77"/>
-                </a:solidFill>
-                <a:latin typeface="Calibri" pitchFamily="34" charset="0"/>
-                <a:ea typeface="Calibri" pitchFamily="34" charset="-122"/>
-                <a:cs typeface="Calibri" pitchFamily="34" charset="-120"/>
-              </a:rPr>
-              <a:t>Geld statt Blut? Solons Verfassung</a:t>
-            </a:r>
-            <a:endParaRPr lang="en-US" sz="900" dirty="0"/>
-          </a:p>
-        </p:txBody>
-      </p:sp>
-      <p:sp>
-        <p:nvSpPr>
-          <p:cNvPr id="16" name="Text 14"/>
           <p:cNvSpPr txBox="1"/>
           <p:nvPr/>
         </p:nvSpPr>
@@ -6174,7 +6140,7 @@
                 <a:ea typeface="Calibri" pitchFamily="34" charset="-122"/>
                 <a:cs typeface="Calibri" pitchFamily="34" charset="-120"/>
               </a:rPr>
-              <a:t>EINZELARBEIT · HEFT</a:t>
+              <a:t>PARTNERARBEIT · HEFT</a:t>
             </a:r>
             <a:endParaRPr lang="en-US" sz="1100" dirty="0"/>
           </a:p>
@@ -6213,7 +6179,7 @@
                 <a:ea typeface="Cambria" pitchFamily="34" charset="-122"/>
                 <a:cs typeface="Cambria" pitchFamily="34" charset="-120"/>
               </a:rPr>
-              <a:t>Dein Urteil</a:t>
+              <a:t>Demokratisch oder timokratisch?</a:t>
             </a:r>
             <a:endParaRPr lang="en-US" sz="2800" dirty="0"/>
           </a:p>
@@ -6256,7 +6222,7 @@
                 <a:ea typeface="Calibri" pitchFamily="34" charset="-122"/>
                 <a:cs typeface="Calibri" pitchFamily="34" charset="-120"/>
               </a:rPr>
-              <a:t>6 Min.</a:t>
+              <a:t>4 Min.</a:t>
             </a:r>
             <a:endParaRPr lang="en-US" sz="1100" dirty="0"/>
           </a:p>
@@ -6270,38 +6236,34 @@
         </p:nvSpPr>
         <p:spPr>
           <a:xfrm>
-            <a:off x="457200" y="1234440"/>
-            <a:ext cx="1554480" cy="1024128"/>
-          </a:xfrm>
-          <a:prstGeom prst="roundRect">
-            <a:avLst>
-              <a:gd name="adj" fmla="val 7143"/>
-            </a:avLst>
-          </a:prstGeom>
-          <a:solidFill>
-            <a:srgbClr val="D9A441"/>
-          </a:solidFill>
-          <a:ln/>
-        </p:spPr>
-        <p:txBody>
-          <a:bodyPr wrap="square" lIns="0" tIns="0" rIns="0" bIns="0" rtlCol="0" anchor="ctr"/>
-          <a:lstStyle/>
-          <a:p>
-            <a:pPr algn="ctr" indent="0" marL="0">
-              <a:buNone/>
-            </a:pPr>
-            <a:r>
-              <a:rPr lang="en-US" sz="1500" b="1" dirty="0">
-                <a:solidFill>
-                  <a:srgbClr val="2B2318"/>
+            <a:off x="457200" y="1143000"/>
+            <a:ext cx="8229600" cy="502920"/>
+          </a:xfrm>
+          <a:prstGeom prst="rect">
+            <a:avLst/>
+          </a:prstGeom>
+          <a:noFill/>
+          <a:ln/>
+        </p:spPr>
+        <p:txBody>
+          <a:bodyPr wrap="square" lIns="0" tIns="0" rIns="0" bIns="0" rtlCol="0" anchor="t"/>
+          <a:lstStyle/>
+          <a:p>
+            <a:pPr indent="0" marL="0">
+              <a:buNone/>
+            </a:pPr>
+            <a:r>
+              <a:rPr lang="en-US" sz="1350" b="1" dirty="0">
+                <a:solidFill>
+                  <a:srgbClr val="5A5044"/>
                 </a:solidFill>
                 <a:latin typeface="Calibri" pitchFamily="34" charset="0"/>
                 <a:ea typeface="Calibri" pitchFamily="34" charset="-122"/>
                 <a:cs typeface="Calibri" pitchFamily="34" charset="-120"/>
               </a:rPr>
-              <a:t>Sachurteil</a:t>
-            </a:r>
-            <a:endParaRPr lang="en-US" sz="1500" dirty="0"/>
+              <a:t>Legt im Heft zwei Spalten an und ordnet die sechs Merkmale zu: demokratisch = das Volk entscheidet · timokratisch = der Besitz entscheidet.</a:t>
+            </a:r>
+            <a:endParaRPr lang="en-US" sz="1350" dirty="0"/>
           </a:p>
         </p:txBody>
       </p:sp>
@@ -6313,12 +6275,12 @@
         </p:nvSpPr>
         <p:spPr>
           <a:xfrm>
-            <a:off x="2103120" y="1234440"/>
-            <a:ext cx="6583680" cy="1024128"/>
+            <a:off x="457200" y="1783080"/>
+            <a:ext cx="4023360" cy="731520"/>
           </a:xfrm>
           <a:prstGeom prst="roundRect">
             <a:avLst>
-              <a:gd name="adj" fmla="val 7143"/>
+              <a:gd name="adj" fmla="val 10000"/>
             </a:avLst>
           </a:prstGeom>
           <a:solidFill>
@@ -6340,24 +6302,65 @@
         </p:nvSpPr>
         <p:spPr>
           <a:xfrm>
-            <a:off x="2286000" y="1325880"/>
-            <a:ext cx="6263640" cy="411480"/>
-          </a:xfrm>
-          <a:prstGeom prst="rect">
-            <a:avLst/>
-          </a:prstGeom>
-          <a:noFill/>
-          <a:ln/>
-        </p:spPr>
-        <p:txBody>
-          <a:bodyPr wrap="square" lIns="0" tIns="0" rIns="0" bIns="0" rtlCol="0" anchor="t"/>
+            <a:off x="594360" y="1938528"/>
+            <a:ext cx="420624" cy="420624"/>
+          </a:xfrm>
+          <a:prstGeom prst="ellipse">
+            <a:avLst/>
+          </a:prstGeom>
+          <a:solidFill>
+            <a:srgbClr val="2B2318"/>
+          </a:solidFill>
+          <a:ln/>
+        </p:spPr>
+        <p:txBody>
+          <a:bodyPr wrap="square" lIns="0" tIns="0" rIns="0" bIns="0" rtlCol="0" anchor="ctr"/>
+          <a:lstStyle/>
+          <a:p>
+            <a:pPr algn="ctr" indent="0" marL="0">
+              <a:buNone/>
+            </a:pPr>
+            <a:r>
+              <a:rPr lang="en-US" sz="1500" b="1" dirty="0">
+                <a:solidFill>
+                  <a:srgbClr val="FFFFFF"/>
+                </a:solidFill>
+                <a:latin typeface="Cambria" pitchFamily="34" charset="0"/>
+                <a:ea typeface="Cambria" pitchFamily="34" charset="-122"/>
+                <a:cs typeface="Cambria" pitchFamily="34" charset="-120"/>
+              </a:rPr>
+              <a:t>1</a:t>
+            </a:r>
+            <a:endParaRPr lang="en-US" sz="1500" dirty="0"/>
+          </a:p>
+        </p:txBody>
+      </p:sp>
+      <p:sp>
+        <p:nvSpPr>
+          <p:cNvPr id="8" name="Text 6"/>
+          <p:cNvSpPr txBox="1"/>
+          <p:nvPr/>
+        </p:nvSpPr>
+        <p:spPr>
+          <a:xfrm>
+            <a:off x="1143000" y="1783080"/>
+            <a:ext cx="3246120" cy="731520"/>
+          </a:xfrm>
+          <a:prstGeom prst="rect">
+            <a:avLst/>
+          </a:prstGeom>
+          <a:noFill/>
+          <a:ln/>
+        </p:spPr>
+        <p:txBody>
+          <a:bodyPr wrap="square" lIns="0" tIns="0" rIns="0" bIns="0" rtlCol="0" anchor="ctr"/>
           <a:lstStyle/>
           <a:p>
             <a:pPr indent="0" marL="0">
               <a:buNone/>
             </a:pPr>
             <a:r>
-              <a:rPr lang="en-US" sz="1300" b="1" dirty="0">
+              <a:rPr lang="en-US" sz="1300" dirty="0">
                 <a:solidFill>
                   <a:srgbClr val="2B2318"/>
                 </a:solidFill>
@@ -6365,7 +6368,7 @@
                 <a:ea typeface="Calibri" pitchFamily="34" charset="-122"/>
                 <a:cs typeface="Calibri" pitchFamily="34" charset="-120"/>
               </a:rPr>
-              <a:t>War Solons Verfassung eher demokratisch oder eher timokratisch? (2–3 Sätze)</a:t>
+              <a:t>Archont kann nur die 1. Klasse werden.</a:t>
             </a:r>
             <a:endParaRPr lang="en-US" sz="1300" dirty="0"/>
           </a:p>
@@ -6373,100 +6376,18 @@
       </p:sp>
       <p:sp>
         <p:nvSpPr>
-          <p:cNvPr id="8" name="Text 6"/>
-          <p:cNvSpPr txBox="1"/>
-          <p:nvPr/>
-        </p:nvSpPr>
-        <p:spPr>
-          <a:xfrm>
-            <a:off x="2286000" y="1783080"/>
-            <a:ext cx="6263640" cy="411480"/>
-          </a:xfrm>
-          <a:prstGeom prst="rect">
-            <a:avLst/>
-          </a:prstGeom>
-          <a:noFill/>
-          <a:ln/>
-        </p:spPr>
-        <p:txBody>
-          <a:bodyPr wrap="square" lIns="0" tIns="0" rIns="0" bIns="0" rtlCol="0" anchor="t"/>
-          <a:lstStyle/>
-          <a:p>
-            <a:pPr indent="0" marL="0">
-              <a:buNone/>
-            </a:pPr>
-            <a:r>
-              <a:rPr lang="en-US" sz="1250" i="1" dirty="0">
-                <a:solidFill>
-                  <a:srgbClr val="5A5044"/>
-                </a:solidFill>
-                <a:latin typeface="Calibri" pitchFamily="34" charset="0"/>
-                <a:ea typeface="Calibri" pitchFamily="34" charset="-122"/>
-                <a:cs typeface="Calibri" pitchFamily="34" charset="-120"/>
-              </a:rPr>
-              <a:t>„Aus Sicht der damaligen Zeit war Solons Verfassung eher …, denn …“</a:t>
-            </a:r>
-            <a:endParaRPr lang="en-US" sz="1250" dirty="0"/>
-          </a:p>
-        </p:txBody>
-      </p:sp>
-      <p:sp>
-        <p:nvSpPr>
-          <p:cNvPr id="9" name="Text 7"/>
-          <p:cNvSpPr txBox="1"/>
-          <p:nvPr/>
-        </p:nvSpPr>
-        <p:spPr>
-          <a:xfrm>
-            <a:off x="457200" y="2423160"/>
-            <a:ext cx="1554480" cy="1024128"/>
+          <p:cNvPr id="9" name="Shape 7"/>
+          <p:cNvSpPr/>
+          <p:nvPr/>
+        </p:nvSpPr>
+        <p:spPr>
+          <a:xfrm>
+            <a:off x="4663440" y="1783080"/>
+            <a:ext cx="4023360" cy="731520"/>
           </a:xfrm>
           <a:prstGeom prst="roundRect">
             <a:avLst>
-              <a:gd name="adj" fmla="val 7143"/>
-            </a:avLst>
-          </a:prstGeom>
-          <a:solidFill>
-            <a:srgbClr val="AD4426"/>
-          </a:solidFill>
-          <a:ln/>
-        </p:spPr>
-        <p:txBody>
-          <a:bodyPr wrap="square" lIns="0" tIns="0" rIns="0" bIns="0" rtlCol="0" anchor="ctr"/>
-          <a:lstStyle/>
-          <a:p>
-            <a:pPr algn="ctr" indent="0" marL="0">
-              <a:buNone/>
-            </a:pPr>
-            <a:r>
-              <a:rPr lang="en-US" sz="1500" b="1" dirty="0">
-                <a:solidFill>
-                  <a:srgbClr val="FFFFFF"/>
-                </a:solidFill>
-                <a:latin typeface="Calibri" pitchFamily="34" charset="0"/>
-                <a:ea typeface="Calibri" pitchFamily="34" charset="-122"/>
-                <a:cs typeface="Calibri" pitchFamily="34" charset="-120"/>
-              </a:rPr>
-              <a:t>Werturteil</a:t>
-            </a:r>
-            <a:endParaRPr lang="en-US" sz="1500" dirty="0"/>
-          </a:p>
-        </p:txBody>
-      </p:sp>
-      <p:sp>
-        <p:nvSpPr>
-          <p:cNvPr id="10" name="Shape 8"/>
-          <p:cNvSpPr/>
-          <p:nvPr/>
-        </p:nvSpPr>
-        <p:spPr>
-          <a:xfrm>
-            <a:off x="2103120" y="2423160"/>
-            <a:ext cx="6583680" cy="1024128"/>
-          </a:xfrm>
-          <a:prstGeom prst="roundRect">
-            <a:avLst>
-              <a:gd name="adj" fmla="val 7143"/>
+              <a:gd name="adj" fmla="val 10000"/>
             </a:avLst>
           </a:prstGeom>
           <a:solidFill>
@@ -6482,30 +6403,71 @@
       </p:sp>
       <p:sp>
         <p:nvSpPr>
+          <p:cNvPr id="10" name="Text 8"/>
+          <p:cNvSpPr txBox="1"/>
+          <p:nvPr/>
+        </p:nvSpPr>
+        <p:spPr>
+          <a:xfrm>
+            <a:off x="4800600" y="1938528"/>
+            <a:ext cx="420624" cy="420624"/>
+          </a:xfrm>
+          <a:prstGeom prst="ellipse">
+            <a:avLst/>
+          </a:prstGeom>
+          <a:solidFill>
+            <a:srgbClr val="2B2318"/>
+          </a:solidFill>
+          <a:ln/>
+        </p:spPr>
+        <p:txBody>
+          <a:bodyPr wrap="square" lIns="0" tIns="0" rIns="0" bIns="0" rtlCol="0" anchor="ctr"/>
+          <a:lstStyle/>
+          <a:p>
+            <a:pPr algn="ctr" indent="0" marL="0">
+              <a:buNone/>
+            </a:pPr>
+            <a:r>
+              <a:rPr lang="en-US" sz="1500" b="1" dirty="0">
+                <a:solidFill>
+                  <a:srgbClr val="FFFFFF"/>
+                </a:solidFill>
+                <a:latin typeface="Cambria" pitchFamily="34" charset="0"/>
+                <a:ea typeface="Cambria" pitchFamily="34" charset="-122"/>
+                <a:cs typeface="Cambria" pitchFamily="34" charset="-120"/>
+              </a:rPr>
+              <a:t>2</a:t>
+            </a:r>
+            <a:endParaRPr lang="en-US" sz="1500" dirty="0"/>
+          </a:p>
+        </p:txBody>
+      </p:sp>
+      <p:sp>
+        <p:nvSpPr>
           <p:cNvPr id="11" name="Text 9"/>
           <p:cNvSpPr txBox="1"/>
           <p:nvPr/>
         </p:nvSpPr>
         <p:spPr>
           <a:xfrm>
-            <a:off x="2286000" y="2514600"/>
-            <a:ext cx="6263640" cy="411480"/>
-          </a:xfrm>
-          <a:prstGeom prst="rect">
-            <a:avLst/>
-          </a:prstGeom>
-          <a:noFill/>
-          <a:ln/>
-        </p:spPr>
-        <p:txBody>
-          <a:bodyPr wrap="square" lIns="0" tIns="0" rIns="0" bIns="0" rtlCol="0" anchor="t"/>
+            <a:off x="5349240" y="1783080"/>
+            <a:ext cx="3246120" cy="731520"/>
+          </a:xfrm>
+          <a:prstGeom prst="rect">
+            <a:avLst/>
+          </a:prstGeom>
+          <a:noFill/>
+          <a:ln/>
+        </p:spPr>
+        <p:txBody>
+          <a:bodyPr wrap="square" lIns="0" tIns="0" rIns="0" bIns="0" rtlCol="0" anchor="ctr"/>
           <a:lstStyle/>
           <a:p>
             <a:pPr indent="0" marL="0">
               <a:buNone/>
             </a:pPr>
             <a:r>
-              <a:rPr lang="en-US" sz="1300" b="1" dirty="0">
+              <a:rPr lang="en-US" sz="1300" dirty="0">
                 <a:solidFill>
                   <a:srgbClr val="2B2318"/>
                 </a:solidFill>
@@ -6513,7 +6475,7 @@
                 <a:ea typeface="Calibri" pitchFamily="34" charset="-122"/>
                 <a:cs typeface="Calibri" pitchFamily="34" charset="-120"/>
               </a:rPr>
-              <a:t>Ist es gerecht, dass die Ämter vom Besitz abhängen? Nenne deinen Maßstab (1–4).</a:t>
+              <a:t>Alle Bürger über 20 stimmen in der Volksversammlung über Gesetze ab.</a:t>
             </a:r>
             <a:endParaRPr lang="en-US" sz="1300" dirty="0"/>
           </a:p>
@@ -6521,154 +6483,465 @@
       </p:sp>
       <p:sp>
         <p:nvSpPr>
-          <p:cNvPr id="12" name="Text 10"/>
-          <p:cNvSpPr txBox="1"/>
-          <p:nvPr/>
-        </p:nvSpPr>
-        <p:spPr>
-          <a:xfrm>
-            <a:off x="2286000" y="2971800"/>
-            <a:ext cx="6263640" cy="411480"/>
-          </a:xfrm>
-          <a:prstGeom prst="rect">
-            <a:avLst/>
-          </a:prstGeom>
-          <a:noFill/>
-          <a:ln/>
-        </p:spPr>
-        <p:txBody>
-          <a:bodyPr wrap="square" lIns="0" tIns="0" rIns="0" bIns="0" rtlCol="0" anchor="t"/>
+          <p:cNvPr id="12" name="Shape 10"/>
+          <p:cNvSpPr/>
+          <p:nvPr/>
+        </p:nvSpPr>
+        <p:spPr>
+          <a:xfrm>
+            <a:off x="457200" y="2651760"/>
+            <a:ext cx="4023360" cy="731520"/>
+          </a:xfrm>
+          <a:prstGeom prst="roundRect">
+            <a:avLst>
+              <a:gd name="adj" fmla="val 10000"/>
+            </a:avLst>
+          </a:prstGeom>
+          <a:solidFill>
+            <a:srgbClr val="F4ECDE"/>
+          </a:solidFill>
+          <a:ln w="12700">
+            <a:solidFill>
+              <a:srgbClr val="F4ECDE"/>
+            </a:solidFill>
+            <a:prstDash val="solid"/>
+          </a:ln>
+        </p:spPr>
+      </p:sp>
+      <p:sp>
+        <p:nvSpPr>
+          <p:cNvPr id="13" name="Text 11"/>
+          <p:cNvSpPr txBox="1"/>
+          <p:nvPr/>
+        </p:nvSpPr>
+        <p:spPr>
+          <a:xfrm>
+            <a:off x="594360" y="2807208"/>
+            <a:ext cx="420624" cy="420624"/>
+          </a:xfrm>
+          <a:prstGeom prst="ellipse">
+            <a:avLst/>
+          </a:prstGeom>
+          <a:solidFill>
+            <a:srgbClr val="2B2318"/>
+          </a:solidFill>
+          <a:ln/>
+        </p:spPr>
+        <p:txBody>
+          <a:bodyPr wrap="square" lIns="0" tIns="0" rIns="0" bIns="0" rtlCol="0" anchor="ctr"/>
+          <a:lstStyle/>
+          <a:p>
+            <a:pPr algn="ctr" indent="0" marL="0">
+              <a:buNone/>
+            </a:pPr>
+            <a:r>
+              <a:rPr lang="en-US" sz="1500" b="1" dirty="0">
+                <a:solidFill>
+                  <a:srgbClr val="FFFFFF"/>
+                </a:solidFill>
+                <a:latin typeface="Cambria" pitchFamily="34" charset="0"/>
+                <a:ea typeface="Cambria" pitchFamily="34" charset="-122"/>
+                <a:cs typeface="Cambria" pitchFamily="34" charset="-120"/>
+              </a:rPr>
+              <a:t>3</a:t>
+            </a:r>
+            <a:endParaRPr lang="en-US" sz="1500" dirty="0"/>
+          </a:p>
+        </p:txBody>
+      </p:sp>
+      <p:sp>
+        <p:nvSpPr>
+          <p:cNvPr id="14" name="Text 12"/>
+          <p:cNvSpPr txBox="1"/>
+          <p:nvPr/>
+        </p:nvSpPr>
+        <p:spPr>
+          <a:xfrm>
+            <a:off x="1143000" y="2651760"/>
+            <a:ext cx="3246120" cy="731520"/>
+          </a:xfrm>
+          <a:prstGeom prst="rect">
+            <a:avLst/>
+          </a:prstGeom>
+          <a:noFill/>
+          <a:ln/>
+        </p:spPr>
+        <p:txBody>
+          <a:bodyPr wrap="square" lIns="0" tIns="0" rIns="0" bIns="0" rtlCol="0" anchor="ctr"/>
           <a:lstStyle/>
           <a:p>
             <a:pPr indent="0" marL="0">
               <a:buNone/>
             </a:pPr>
             <a:r>
-              <a:rPr lang="en-US" sz="1250" i="1" dirty="0">
-                <a:solidFill>
-                  <a:srgbClr val="5A5044"/>
+              <a:rPr lang="en-US" sz="1300" dirty="0">
+                <a:solidFill>
+                  <a:srgbClr val="2B2318"/>
                 </a:solidFill>
                 <a:latin typeface="Calibri" pitchFamily="34" charset="0"/>
                 <a:ea typeface="Calibri" pitchFamily="34" charset="-122"/>
                 <a:cs typeface="Calibri" pitchFamily="34" charset="-120"/>
               </a:rPr>
-              <a:t>„Gemessen an Maßstab … halte ich das für …, weil …“</a:t>
-            </a:r>
-            <a:endParaRPr lang="en-US" sz="1250" dirty="0"/>
-          </a:p>
-        </p:txBody>
-      </p:sp>
-      <p:sp>
-        <p:nvSpPr>
-          <p:cNvPr id="13" name="Text 11"/>
-          <p:cNvSpPr txBox="1"/>
-          <p:nvPr/>
-        </p:nvSpPr>
-        <p:spPr>
-          <a:xfrm>
-            <a:off x="457200" y="3749040"/>
-            <a:ext cx="8229600" cy="274320"/>
-          </a:xfrm>
-          <a:prstGeom prst="rect">
-            <a:avLst/>
-          </a:prstGeom>
-          <a:noFill/>
-          <a:ln/>
-        </p:spPr>
-        <p:txBody>
-          <a:bodyPr wrap="square" lIns="0" tIns="0" rIns="0" bIns="0" rtlCol="0" anchor="t"/>
+              <a:t>In den Rat der 400 dürfen nur die Klassen 1–3.</a:t>
+            </a:r>
+            <a:endParaRPr lang="en-US" sz="1300" dirty="0"/>
+          </a:p>
+        </p:txBody>
+      </p:sp>
+      <p:sp>
+        <p:nvSpPr>
+          <p:cNvPr id="15" name="Shape 13"/>
+          <p:cNvSpPr/>
+          <p:nvPr/>
+        </p:nvSpPr>
+        <p:spPr>
+          <a:xfrm>
+            <a:off x="4663440" y="2651760"/>
+            <a:ext cx="4023360" cy="731520"/>
+          </a:xfrm>
+          <a:prstGeom prst="roundRect">
+            <a:avLst>
+              <a:gd name="adj" fmla="val 10000"/>
+            </a:avLst>
+          </a:prstGeom>
+          <a:solidFill>
+            <a:srgbClr val="F4ECDE"/>
+          </a:solidFill>
+          <a:ln w="12700">
+            <a:solidFill>
+              <a:srgbClr val="F4ECDE"/>
+            </a:solidFill>
+            <a:prstDash val="solid"/>
+          </a:ln>
+        </p:spPr>
+      </p:sp>
+      <p:sp>
+        <p:nvSpPr>
+          <p:cNvPr id="16" name="Text 14"/>
+          <p:cNvSpPr txBox="1"/>
+          <p:nvPr/>
+        </p:nvSpPr>
+        <p:spPr>
+          <a:xfrm>
+            <a:off x="4800600" y="2807208"/>
+            <a:ext cx="420624" cy="420624"/>
+          </a:xfrm>
+          <a:prstGeom prst="ellipse">
+            <a:avLst/>
+          </a:prstGeom>
+          <a:solidFill>
+            <a:srgbClr val="2B2318"/>
+          </a:solidFill>
+          <a:ln/>
+        </p:spPr>
+        <p:txBody>
+          <a:bodyPr wrap="square" lIns="0" tIns="0" rIns="0" bIns="0" rtlCol="0" anchor="ctr"/>
+          <a:lstStyle/>
+          <a:p>
+            <a:pPr algn="ctr" indent="0" marL="0">
+              <a:buNone/>
+            </a:pPr>
+            <a:r>
+              <a:rPr lang="en-US" sz="1500" b="1" dirty="0">
+                <a:solidFill>
+                  <a:srgbClr val="FFFFFF"/>
+                </a:solidFill>
+                <a:latin typeface="Cambria" pitchFamily="34" charset="0"/>
+                <a:ea typeface="Cambria" pitchFamily="34" charset="-122"/>
+                <a:cs typeface="Cambria" pitchFamily="34" charset="-120"/>
+              </a:rPr>
+              <a:t>4</a:t>
+            </a:r>
+            <a:endParaRPr lang="en-US" sz="1500" dirty="0"/>
+          </a:p>
+        </p:txBody>
+      </p:sp>
+      <p:sp>
+        <p:nvSpPr>
+          <p:cNvPr id="17" name="Text 15"/>
+          <p:cNvSpPr txBox="1"/>
+          <p:nvPr/>
+        </p:nvSpPr>
+        <p:spPr>
+          <a:xfrm>
+            <a:off x="5349240" y="2651760"/>
+            <a:ext cx="3246120" cy="731520"/>
+          </a:xfrm>
+          <a:prstGeom prst="rect">
+            <a:avLst/>
+          </a:prstGeom>
+          <a:noFill/>
+          <a:ln/>
+        </p:spPr>
+        <p:txBody>
+          <a:bodyPr wrap="square" lIns="0" tIns="0" rIns="0" bIns="0" rtlCol="0" anchor="ctr"/>
           <a:lstStyle/>
           <a:p>
             <a:pPr indent="0" marL="0">
               <a:buNone/>
             </a:pPr>
             <a:r>
-              <a:rPr lang="en-US" sz="1200" b="1" dirty="0">
-                <a:solidFill>
-                  <a:srgbClr val="5A5044"/>
+              <a:rPr lang="en-US" sz="1300" dirty="0">
+                <a:solidFill>
+                  <a:srgbClr val="2B2318"/>
                 </a:solidFill>
                 <a:latin typeface="Calibri" pitchFamily="34" charset="0"/>
                 <a:ea typeface="Calibri" pitchFamily="34" charset="-122"/>
                 <a:cs typeface="Calibri" pitchFamily="34" charset="-120"/>
               </a:rPr>
-              <a:t>Maßstäbe: 1 Gleichheit · 2 Leistung · 3 Schutz der Schwachen · 4 Gleiche Regeln</a:t>
-            </a:r>
-            <a:endParaRPr lang="en-US" sz="1200" dirty="0"/>
-          </a:p>
-        </p:txBody>
-      </p:sp>
-      <p:sp>
-        <p:nvSpPr>
-          <p:cNvPr id="14" name="Text 12"/>
-          <p:cNvSpPr txBox="1"/>
-          <p:nvPr/>
-        </p:nvSpPr>
-        <p:spPr>
-          <a:xfrm>
-            <a:off x="457200" y="4069080"/>
-            <a:ext cx="8229600" cy="274320"/>
-          </a:xfrm>
-          <a:prstGeom prst="rect">
-            <a:avLst/>
-          </a:prstGeom>
-          <a:noFill/>
-          <a:ln/>
-        </p:spPr>
-        <p:txBody>
-          <a:bodyPr wrap="square" lIns="0" tIns="0" rIns="0" bIns="0" rtlCol="0" anchor="t"/>
+              <a:t>Jeder Bürger darf vor Gericht klagen.</a:t>
+            </a:r>
+            <a:endParaRPr lang="en-US" sz="1300" dirty="0"/>
+          </a:p>
+        </p:txBody>
+      </p:sp>
+      <p:sp>
+        <p:nvSpPr>
+          <p:cNvPr id="18" name="Shape 16"/>
+          <p:cNvSpPr/>
+          <p:nvPr/>
+        </p:nvSpPr>
+        <p:spPr>
+          <a:xfrm>
+            <a:off x="457200" y="3520440"/>
+            <a:ext cx="4023360" cy="731520"/>
+          </a:xfrm>
+          <a:prstGeom prst="roundRect">
+            <a:avLst>
+              <a:gd name="adj" fmla="val 10000"/>
+            </a:avLst>
+          </a:prstGeom>
+          <a:solidFill>
+            <a:srgbClr val="F4ECDE"/>
+          </a:solidFill>
+          <a:ln w="12700">
+            <a:solidFill>
+              <a:srgbClr val="F4ECDE"/>
+            </a:solidFill>
+            <a:prstDash val="solid"/>
+          </a:ln>
+        </p:spPr>
+      </p:sp>
+      <p:sp>
+        <p:nvSpPr>
+          <p:cNvPr id="19" name="Text 17"/>
+          <p:cNvSpPr txBox="1"/>
+          <p:nvPr/>
+        </p:nvSpPr>
+        <p:spPr>
+          <a:xfrm>
+            <a:off x="594360" y="3675888"/>
+            <a:ext cx="420624" cy="420624"/>
+          </a:xfrm>
+          <a:prstGeom prst="ellipse">
+            <a:avLst/>
+          </a:prstGeom>
+          <a:solidFill>
+            <a:srgbClr val="2B2318"/>
+          </a:solidFill>
+          <a:ln/>
+        </p:spPr>
+        <p:txBody>
+          <a:bodyPr wrap="square" lIns="0" tIns="0" rIns="0" bIns="0" rtlCol="0" anchor="ctr"/>
+          <a:lstStyle/>
+          <a:p>
+            <a:pPr algn="ctr" indent="0" marL="0">
+              <a:buNone/>
+            </a:pPr>
+            <a:r>
+              <a:rPr lang="en-US" sz="1500" b="1" dirty="0">
+                <a:solidFill>
+                  <a:srgbClr val="FFFFFF"/>
+                </a:solidFill>
+                <a:latin typeface="Cambria" pitchFamily="34" charset="0"/>
+                <a:ea typeface="Cambria" pitchFamily="34" charset="-122"/>
+                <a:cs typeface="Cambria" pitchFamily="34" charset="-120"/>
+              </a:rPr>
+              <a:t>5</a:t>
+            </a:r>
+            <a:endParaRPr lang="en-US" sz="1500" dirty="0"/>
+          </a:p>
+        </p:txBody>
+      </p:sp>
+      <p:sp>
+        <p:nvSpPr>
+          <p:cNvPr id="20" name="Text 18"/>
+          <p:cNvSpPr txBox="1"/>
+          <p:nvPr/>
+        </p:nvSpPr>
+        <p:spPr>
+          <a:xfrm>
+            <a:off x="1143000" y="3520440"/>
+            <a:ext cx="3246120" cy="731520"/>
+          </a:xfrm>
+          <a:prstGeom prst="rect">
+            <a:avLst/>
+          </a:prstGeom>
+          <a:noFill/>
+          <a:ln/>
+        </p:spPr>
+        <p:txBody>
+          <a:bodyPr wrap="square" lIns="0" tIns="0" rIns="0" bIns="0" rtlCol="0" anchor="ctr"/>
           <a:lstStyle/>
           <a:p>
             <a:pPr indent="0" marL="0">
               <a:buNone/>
             </a:pPr>
             <a:r>
-              <a:rPr lang="en-US" sz="1200" i="1" dirty="0">
-                <a:solidFill>
-                  <a:srgbClr val="998C77"/>
+              <a:rPr lang="en-US" sz="1300" dirty="0">
+                <a:solidFill>
+                  <a:srgbClr val="2B2318"/>
                 </a:solidFill>
                 <a:latin typeface="Calibri" pitchFamily="34" charset="0"/>
                 <a:ea typeface="Calibri" pitchFamily="34" charset="-122"/>
                 <a:cs typeface="Calibri" pitchFamily="34" charset="-120"/>
               </a:rPr>
-              <a:t>Zeit knapp? Das Werturteil ist Hausaufgabe.</a:t>
-            </a:r>
-            <a:endParaRPr lang="en-US" sz="1200" dirty="0"/>
-          </a:p>
-        </p:txBody>
-      </p:sp>
-      <p:sp>
-        <p:nvSpPr>
-          <p:cNvPr id="15" name="Text 13"/>
-          <p:cNvSpPr txBox="1"/>
-          <p:nvPr/>
-        </p:nvSpPr>
-        <p:spPr>
-          <a:xfrm>
-            <a:off x="457200" y="4754880"/>
-            <a:ext cx="4572000" cy="182880"/>
-          </a:xfrm>
-          <a:prstGeom prst="rect">
-            <a:avLst/>
-          </a:prstGeom>
-          <a:noFill/>
-          <a:ln/>
-        </p:spPr>
-        <p:txBody>
-          <a:bodyPr wrap="square" lIns="0" tIns="0" rIns="0" bIns="0" rtlCol="0" anchor="t"/>
+              <a:t>Der Areopag besteht aus ehemaligen Archonten.</a:t>
+            </a:r>
+            <a:endParaRPr lang="en-US" sz="1300" dirty="0"/>
+          </a:p>
+        </p:txBody>
+      </p:sp>
+      <p:sp>
+        <p:nvSpPr>
+          <p:cNvPr id="21" name="Shape 19"/>
+          <p:cNvSpPr/>
+          <p:nvPr/>
+        </p:nvSpPr>
+        <p:spPr>
+          <a:xfrm>
+            <a:off x="4663440" y="3520440"/>
+            <a:ext cx="4023360" cy="731520"/>
+          </a:xfrm>
+          <a:prstGeom prst="roundRect">
+            <a:avLst>
+              <a:gd name="adj" fmla="val 10000"/>
+            </a:avLst>
+          </a:prstGeom>
+          <a:solidFill>
+            <a:srgbClr val="F4ECDE"/>
+          </a:solidFill>
+          <a:ln w="12700">
+            <a:solidFill>
+              <a:srgbClr val="F4ECDE"/>
+            </a:solidFill>
+            <a:prstDash val="solid"/>
+          </a:ln>
+        </p:spPr>
+      </p:sp>
+      <p:sp>
+        <p:nvSpPr>
+          <p:cNvPr id="22" name="Text 20"/>
+          <p:cNvSpPr txBox="1"/>
+          <p:nvPr/>
+        </p:nvSpPr>
+        <p:spPr>
+          <a:xfrm>
+            <a:off x="4800600" y="3675888"/>
+            <a:ext cx="420624" cy="420624"/>
+          </a:xfrm>
+          <a:prstGeom prst="ellipse">
+            <a:avLst/>
+          </a:prstGeom>
+          <a:solidFill>
+            <a:srgbClr val="2B2318"/>
+          </a:solidFill>
+          <a:ln/>
+        </p:spPr>
+        <p:txBody>
+          <a:bodyPr wrap="square" lIns="0" tIns="0" rIns="0" bIns="0" rtlCol="0" anchor="ctr"/>
+          <a:lstStyle/>
+          <a:p>
+            <a:pPr algn="ctr" indent="0" marL="0">
+              <a:buNone/>
+            </a:pPr>
+            <a:r>
+              <a:rPr lang="en-US" sz="1500" b="1" dirty="0">
+                <a:solidFill>
+                  <a:srgbClr val="FFFFFF"/>
+                </a:solidFill>
+                <a:latin typeface="Cambria" pitchFamily="34" charset="0"/>
+                <a:ea typeface="Cambria" pitchFamily="34" charset="-122"/>
+                <a:cs typeface="Cambria" pitchFamily="34" charset="-120"/>
+              </a:rPr>
+              <a:t>6</a:t>
+            </a:r>
+            <a:endParaRPr lang="en-US" sz="1500" dirty="0"/>
+          </a:p>
+        </p:txBody>
+      </p:sp>
+      <p:sp>
+        <p:nvSpPr>
+          <p:cNvPr id="23" name="Text 21"/>
+          <p:cNvSpPr txBox="1"/>
+          <p:nvPr/>
+        </p:nvSpPr>
+        <p:spPr>
+          <a:xfrm>
+            <a:off x="5349240" y="3520440"/>
+            <a:ext cx="3246120" cy="731520"/>
+          </a:xfrm>
+          <a:prstGeom prst="rect">
+            <a:avLst/>
+          </a:prstGeom>
+          <a:noFill/>
+          <a:ln/>
+        </p:spPr>
+        <p:txBody>
+          <a:bodyPr wrap="square" lIns="0" tIns="0" rIns="0" bIns="0" rtlCol="0" anchor="ctr"/>
           <a:lstStyle/>
           <a:p>
             <a:pPr indent="0" marL="0">
               <a:buNone/>
             </a:pPr>
             <a:r>
-              <a:rPr lang="en-US" sz="900" dirty="0">
-                <a:solidFill>
-                  <a:srgbClr val="998C77"/>
+              <a:rPr lang="en-US" sz="1300" dirty="0">
+                <a:solidFill>
+                  <a:srgbClr val="2B2318"/>
                 </a:solidFill>
                 <a:latin typeface="Calibri" pitchFamily="34" charset="0"/>
                 <a:ea typeface="Calibri" pitchFamily="34" charset="-122"/>
                 <a:cs typeface="Calibri" pitchFamily="34" charset="-120"/>
               </a:rPr>
+              <a:t>Auch die Theten wählen die Beamten.</a:t>
+            </a:r>
+            <a:endParaRPr lang="en-US" sz="1300" dirty="0"/>
+          </a:p>
+        </p:txBody>
+      </p:sp>
+      <p:sp>
+        <p:nvSpPr>
+          <p:cNvPr id="24" name="Text 22"/>
+          <p:cNvSpPr txBox="1"/>
+          <p:nvPr/>
+        </p:nvSpPr>
+        <p:spPr>
+          <a:xfrm>
+            <a:off x="457200" y="4754880"/>
+            <a:ext cx="4572000" cy="182880"/>
+          </a:xfrm>
+          <a:prstGeom prst="rect">
+            <a:avLst/>
+          </a:prstGeom>
+          <a:noFill/>
+          <a:ln/>
+        </p:spPr>
+        <p:txBody>
+          <a:bodyPr wrap="square" lIns="0" tIns="0" rIns="0" bIns="0" rtlCol="0" anchor="t"/>
+          <a:lstStyle/>
+          <a:p>
+            <a:pPr indent="0" marL="0">
+              <a:buNone/>
+            </a:pPr>
+            <a:r>
+              <a:rPr lang="en-US" sz="900" dirty="0">
+                <a:solidFill>
+                  <a:srgbClr val="998C77"/>
+                </a:solidFill>
+                <a:latin typeface="Calibri" pitchFamily="34" charset="0"/>
+                <a:ea typeface="Calibri" pitchFamily="34" charset="-122"/>
+                <a:cs typeface="Calibri" pitchFamily="34" charset="-120"/>
+              </a:rPr>
               <a:t>Geld statt Blut? Solons Verfassung</a:t>
             </a:r>
             <a:endParaRPr lang="en-US" sz="900" dirty="0"/>
@@ -6677,7 +6950,7 @@
       </p:sp>
       <p:sp>
         <p:nvSpPr>
-          <p:cNvPr id="16" name="Text 14"/>
+          <p:cNvPr id="25" name="Text 23"/>
           <p:cNvSpPr txBox="1"/>
           <p:nvPr/>
         </p:nvSpPr>
@@ -6779,7 +7052,7 @@
                 <a:ea typeface="Calibri" pitchFamily="34" charset="-122"/>
                 <a:cs typeface="Calibri" pitchFamily="34" charset="-120"/>
               </a:rPr>
-              <a:t>URTEIL · BEISPIEL</a:t>
+              <a:t>AUFLÖSUNG</a:t>
             </a:r>
             <a:endParaRPr lang="en-US" sz="1100" dirty="0"/>
           </a:p>
@@ -6818,7 +7091,7 @@
                 <a:ea typeface="Cambria" pitchFamily="34" charset="-122"/>
                 <a:cs typeface="Cambria" pitchFamily="34" charset="-120"/>
               </a:rPr>
-              <a:t>So könnte das Urteil aussehen</a:t>
+              <a:t>Beides!</a:t>
             </a:r>
             <a:endParaRPr lang="en-US" sz="2800" dirty="0"/>
           </a:p>
@@ -6861,7 +7134,7 @@
                 <a:ea typeface="Calibri" pitchFamily="34" charset="-122"/>
                 <a:cs typeface="Calibri" pitchFamily="34" charset="-120"/>
               </a:rPr>
-              <a:t>Lösung</a:t>
+              <a:t>Auflösung</a:t>
             </a:r>
             <a:endParaRPr lang="en-US" sz="1100" dirty="0"/>
           </a:p>
@@ -6869,61 +7142,18 @@
       </p:sp>
       <p:sp>
         <p:nvSpPr>
-          <p:cNvPr id="5" name="Text 3"/>
-          <p:cNvSpPr txBox="1"/>
-          <p:nvPr/>
-        </p:nvSpPr>
-        <p:spPr>
-          <a:xfrm>
-            <a:off x="457200" y="1234440"/>
-            <a:ext cx="1554480" cy="1508760"/>
+          <p:cNvPr id="5" name="Shape 3"/>
+          <p:cNvSpPr/>
+          <p:nvPr/>
+        </p:nvSpPr>
+        <p:spPr>
+          <a:xfrm>
+            <a:off x="457200" y="1188720"/>
+            <a:ext cx="4023360" cy="2377440"/>
           </a:xfrm>
           <a:prstGeom prst="roundRect">
             <a:avLst>
-              <a:gd name="adj" fmla="val 4848"/>
-            </a:avLst>
-          </a:prstGeom>
-          <a:solidFill>
-            <a:srgbClr val="D9A441"/>
-          </a:solidFill>
-          <a:ln/>
-        </p:spPr>
-        <p:txBody>
-          <a:bodyPr wrap="square" lIns="0" tIns="0" rIns="0" bIns="0" rtlCol="0" anchor="ctr"/>
-          <a:lstStyle/>
-          <a:p>
-            <a:pPr algn="ctr" indent="0" marL="0">
-              <a:buNone/>
-            </a:pPr>
-            <a:r>
-              <a:rPr lang="en-US" sz="1500" b="1" dirty="0">
-                <a:solidFill>
-                  <a:srgbClr val="2B2318"/>
-                </a:solidFill>
-                <a:latin typeface="Calibri" pitchFamily="34" charset="0"/>
-                <a:ea typeface="Calibri" pitchFamily="34" charset="-122"/>
-                <a:cs typeface="Calibri" pitchFamily="34" charset="-120"/>
-              </a:rPr>
-              <a:t>Sachurteil</a:t>
-            </a:r>
-            <a:endParaRPr lang="en-US" sz="1500" dirty="0"/>
-          </a:p>
-        </p:txBody>
-      </p:sp>
-      <p:sp>
-        <p:nvSpPr>
-          <p:cNvPr id="6" name="Shape 4"/>
-          <p:cNvSpPr/>
-          <p:nvPr/>
-        </p:nvSpPr>
-        <p:spPr>
-          <a:xfrm>
-            <a:off x="2103120" y="1234440"/>
-            <a:ext cx="6583680" cy="1508760"/>
-          </a:xfrm>
-          <a:prstGeom prst="roundRect">
-            <a:avLst>
-              <a:gd name="adj" fmla="val 4848"/>
+              <a:gd name="adj" fmla="val 3077"/>
             </a:avLst>
           </a:prstGeom>
           <a:solidFill>
@@ -6939,40 +7169,79 @@
       </p:sp>
       <p:sp>
         <p:nvSpPr>
+          <p:cNvPr id="6" name="Text 4"/>
+          <p:cNvSpPr txBox="1"/>
+          <p:nvPr/>
+        </p:nvSpPr>
+        <p:spPr>
+          <a:xfrm>
+            <a:off x="685800" y="1261872"/>
+            <a:ext cx="3566160" cy="365760"/>
+          </a:xfrm>
+          <a:prstGeom prst="rect">
+            <a:avLst/>
+          </a:prstGeom>
+          <a:noFill/>
+          <a:ln/>
+        </p:spPr>
+        <p:txBody>
+          <a:bodyPr wrap="square" lIns="0" tIns="0" rIns="0" bIns="0" rtlCol="0" anchor="t"/>
+          <a:lstStyle/>
+          <a:p>
+            <a:pPr indent="0" marL="0">
+              <a:buNone/>
+            </a:pPr>
+            <a:r>
+              <a:rPr lang="en-US" sz="1900" b="1" dirty="0">
+                <a:solidFill>
+                  <a:srgbClr val="3C783C"/>
+                </a:solidFill>
+                <a:latin typeface="Cambria" pitchFamily="34" charset="0"/>
+                <a:ea typeface="Cambria" pitchFamily="34" charset="-122"/>
+                <a:cs typeface="Cambria" pitchFamily="34" charset="-120"/>
+              </a:rPr>
+              <a:t>demokratisch</a:t>
+            </a:r>
+            <a:endParaRPr lang="en-US" sz="1900" dirty="0"/>
+          </a:p>
+        </p:txBody>
+      </p:sp>
+      <p:sp>
+        <p:nvSpPr>
           <p:cNvPr id="7" name="Text 5"/>
           <p:cNvSpPr txBox="1"/>
           <p:nvPr/>
         </p:nvSpPr>
         <p:spPr>
           <a:xfrm>
-            <a:off x="2286000" y="1307592"/>
-            <a:ext cx="6263640" cy="1362456"/>
-          </a:xfrm>
-          <a:prstGeom prst="rect">
-            <a:avLst/>
-          </a:prstGeom>
-          <a:noFill/>
-          <a:ln/>
-        </p:spPr>
-        <p:txBody>
-          <a:bodyPr wrap="square" lIns="0" tIns="0" rIns="0" bIns="0" rtlCol="0" anchor="ctr"/>
+            <a:off x="685800" y="1627632"/>
+            <a:ext cx="3566160" cy="256032"/>
+          </a:xfrm>
+          <a:prstGeom prst="rect">
+            <a:avLst/>
+          </a:prstGeom>
+          <a:noFill/>
+          <a:ln/>
+        </p:spPr>
+        <p:txBody>
+          <a:bodyPr wrap="square" lIns="0" tIns="0" rIns="0" bIns="0" rtlCol="0" anchor="t"/>
           <a:lstStyle/>
           <a:p>
             <a:pPr indent="0" marL="0">
               <a:buNone/>
             </a:pPr>
             <a:r>
-              <a:rPr lang="en-US" sz="1300" i="1" dirty="0">
-                <a:solidFill>
-                  <a:srgbClr val="2B2318"/>
+              <a:rPr lang="en-US" sz="1100" i="1" dirty="0">
+                <a:solidFill>
+                  <a:srgbClr val="5A5044"/>
                 </a:solidFill>
                 <a:latin typeface="Calibri" pitchFamily="34" charset="0"/>
                 <a:ea typeface="Calibri" pitchFamily="34" charset="-122"/>
                 <a:cs typeface="Calibri" pitchFamily="34" charset="-120"/>
               </a:rPr>
-              <a:t>„Aus Sicht der damaligen Zeit war Solons Verfassung eher timokratisch, denn die wichtigen Ämter – Archonten, Rat der 400 und Areopag – blieben den Reichen vorbehalten. Sie enthielt aber schon demokratische Elemente: Alle Bürger stimmten in der Volksversammlung ab und durften klagen.“</a:t>
-            </a:r>
-            <a:endParaRPr lang="en-US" sz="1300" dirty="0"/>
+              <a:t>das Volk entscheidet</a:t>
+            </a:r>
+            <a:endParaRPr lang="en-US" sz="1100" dirty="0"/>
           </a:p>
         </p:txBody>
       </p:sp>
@@ -6984,38 +7253,80 @@
         </p:nvSpPr>
         <p:spPr>
           <a:xfrm>
-            <a:off x="457200" y="2880360"/>
-            <a:ext cx="1554480" cy="1508760"/>
-          </a:xfrm>
-          <a:prstGeom prst="roundRect">
-            <a:avLst>
-              <a:gd name="adj" fmla="val 4848"/>
-            </a:avLst>
-          </a:prstGeom>
-          <a:solidFill>
-            <a:srgbClr val="AD4426"/>
-          </a:solidFill>
-          <a:ln/>
-        </p:spPr>
-        <p:txBody>
-          <a:bodyPr wrap="square" lIns="0" tIns="0" rIns="0" bIns="0" rtlCol="0" anchor="ctr"/>
-          <a:lstStyle/>
-          <a:p>
-            <a:pPr algn="ctr" indent="0" marL="0">
-              <a:buNone/>
-            </a:pPr>
-            <a:r>
-              <a:rPr lang="en-US" sz="1500" b="1" dirty="0">
-                <a:solidFill>
-                  <a:srgbClr val="FFFFFF"/>
+            <a:off x="685800" y="1965960"/>
+            <a:ext cx="3611880" cy="1554480"/>
+          </a:xfrm>
+          <a:prstGeom prst="rect">
+            <a:avLst/>
+          </a:prstGeom>
+          <a:noFill/>
+          <a:ln/>
+        </p:spPr>
+        <p:txBody>
+          <a:bodyPr wrap="square" lIns="0" tIns="0" rIns="0" bIns="0" rtlCol="0" anchor="t"/>
+          <a:lstStyle/>
+          <a:p>
+            <a:pPr marL="342900" indent="-342900">
+              <a:spcAft>
+                <a:spcPts val="600"/>
+              </a:spcAft>
+              <a:buSzPct val="100000"/>
+              <a:buChar char="•"/>
+            </a:pPr>
+            <a:r>
+              <a:rPr lang="en-US" sz="1300" dirty="0">
+                <a:solidFill>
+                  <a:srgbClr val="2B2318"/>
                 </a:solidFill>
                 <a:latin typeface="Calibri" pitchFamily="34" charset="0"/>
                 <a:ea typeface="Calibri" pitchFamily="34" charset="-122"/>
                 <a:cs typeface="Calibri" pitchFamily="34" charset="-120"/>
               </a:rPr>
-              <a:t>Werturteil</a:t>
-            </a:r>
-            <a:endParaRPr lang="en-US" sz="1500" dirty="0"/>
+              <a:t>Alle Bürger über 20 stimmen in der Volksversammlung über Gesetze ab.</a:t>
+            </a:r>
+            <a:endParaRPr lang="en-US" sz="1300" dirty="0"/>
+          </a:p>
+          <a:p>
+            <a:pPr marL="342900" indent="-342900">
+              <a:spcAft>
+                <a:spcPts val="600"/>
+              </a:spcAft>
+              <a:buSzPct val="100000"/>
+              <a:buChar char="•"/>
+            </a:pPr>
+            <a:r>
+              <a:rPr lang="en-US" sz="1300" dirty="0">
+                <a:solidFill>
+                  <a:srgbClr val="2B2318"/>
+                </a:solidFill>
+                <a:latin typeface="Calibri" pitchFamily="34" charset="0"/>
+                <a:ea typeface="Calibri" pitchFamily="34" charset="-122"/>
+                <a:cs typeface="Calibri" pitchFamily="34" charset="-120"/>
+              </a:rPr>
+              <a:t>Jeder Bürger darf vor Gericht klagen.</a:t>
+            </a:r>
+            <a:endParaRPr lang="en-US" sz="1300" dirty="0"/>
+          </a:p>
+          <a:p>
+            <a:pPr marL="342900" indent="-342900">
+              <a:spcAft>
+                <a:spcPts val="600"/>
+              </a:spcAft>
+              <a:buSzPct val="100000"/>
+              <a:buChar char="•"/>
+            </a:pPr>
+            <a:r>
+              <a:rPr lang="en-US" sz="1300" dirty="0">
+                <a:solidFill>
+                  <a:srgbClr val="2B2318"/>
+                </a:solidFill>
+                <a:latin typeface="Calibri" pitchFamily="34" charset="0"/>
+                <a:ea typeface="Calibri" pitchFamily="34" charset="-122"/>
+                <a:cs typeface="Calibri" pitchFamily="34" charset="-120"/>
+              </a:rPr>
+              <a:t>Auch die Theten wählen die Beamten.</a:t>
+            </a:r>
+            <a:endParaRPr lang="en-US" sz="1300" dirty="0"/>
           </a:p>
         </p:txBody>
       </p:sp>
@@ -7027,12 +7338,12 @@
         </p:nvSpPr>
         <p:spPr>
           <a:xfrm>
-            <a:off x="2103120" y="2880360"/>
-            <a:ext cx="6583680" cy="1508760"/>
+            <a:off x="4663440" y="1188720"/>
+            <a:ext cx="4023360" cy="2377440"/>
           </a:xfrm>
           <a:prstGeom prst="roundRect">
             <a:avLst>
-              <a:gd name="adj" fmla="val 4848"/>
+              <a:gd name="adj" fmla="val 3077"/>
             </a:avLst>
           </a:prstGeom>
           <a:solidFill>
@@ -7054,47 +7365,86 @@
         </p:nvSpPr>
         <p:spPr>
           <a:xfrm>
-            <a:off x="2286000" y="2953512"/>
-            <a:ext cx="6263640" cy="1362456"/>
-          </a:xfrm>
-          <a:prstGeom prst="rect">
-            <a:avLst/>
-          </a:prstGeom>
-          <a:noFill/>
-          <a:ln/>
-        </p:spPr>
-        <p:txBody>
-          <a:bodyPr wrap="square" lIns="0" tIns="0" rIns="0" bIns="0" rtlCol="0" anchor="ctr"/>
+            <a:off x="4892040" y="1261872"/>
+            <a:ext cx="3566160" cy="365760"/>
+          </a:xfrm>
+          <a:prstGeom prst="rect">
+            <a:avLst/>
+          </a:prstGeom>
+          <a:noFill/>
+          <a:ln/>
+        </p:spPr>
+        <p:txBody>
+          <a:bodyPr wrap="square" lIns="0" tIns="0" rIns="0" bIns="0" rtlCol="0" anchor="t"/>
           <a:lstStyle/>
           <a:p>
             <a:pPr indent="0" marL="0">
               <a:buNone/>
             </a:pPr>
             <a:r>
-              <a:rPr lang="en-US" sz="1300" i="1" dirty="0">
-                <a:solidFill>
-                  <a:srgbClr val="2B2318"/>
+              <a:rPr lang="en-US" sz="1900" b="1" dirty="0">
+                <a:solidFill>
+                  <a:srgbClr val="AD4426"/>
+                </a:solidFill>
+                <a:latin typeface="Cambria" pitchFamily="34" charset="0"/>
+                <a:ea typeface="Cambria" pitchFamily="34" charset="-122"/>
+                <a:cs typeface="Cambria" pitchFamily="34" charset="-120"/>
+              </a:rPr>
+              <a:t>timokratisch</a:t>
+            </a:r>
+            <a:endParaRPr lang="en-US" sz="1900" dirty="0"/>
+          </a:p>
+        </p:txBody>
+      </p:sp>
+      <p:sp>
+        <p:nvSpPr>
+          <p:cNvPr id="11" name="Text 9"/>
+          <p:cNvSpPr txBox="1"/>
+          <p:nvPr/>
+        </p:nvSpPr>
+        <p:spPr>
+          <a:xfrm>
+            <a:off x="4892040" y="1627632"/>
+            <a:ext cx="3566160" cy="256032"/>
+          </a:xfrm>
+          <a:prstGeom prst="rect">
+            <a:avLst/>
+          </a:prstGeom>
+          <a:noFill/>
+          <a:ln/>
+        </p:spPr>
+        <p:txBody>
+          <a:bodyPr wrap="square" lIns="0" tIns="0" rIns="0" bIns="0" rtlCol="0" anchor="t"/>
+          <a:lstStyle/>
+          <a:p>
+            <a:pPr indent="0" marL="0">
+              <a:buNone/>
+            </a:pPr>
+            <a:r>
+              <a:rPr lang="en-US" sz="1100" i="1" dirty="0">
+                <a:solidFill>
+                  <a:srgbClr val="5A5044"/>
                 </a:solidFill>
                 <a:latin typeface="Calibri" pitchFamily="34" charset="0"/>
                 <a:ea typeface="Calibri" pitchFamily="34" charset="-122"/>
                 <a:cs typeface="Calibri" pitchFamily="34" charset="-120"/>
               </a:rPr>
-              <a:t>„Gemessen an Maßstab 1 (Gleichheit) halte ich es für ungerecht, dass die Ämter vom Besitz abhingen, weil arme Bürger so nie selbst regieren konnten. Gemessen an Maßstab 2 (Leistung) lässt es sich begründen: Die Reichen trugen mehr Lasten, etwa die eigene Rüstung im Krieg.“</a:t>
-            </a:r>
-            <a:endParaRPr lang="en-US" sz="1300" dirty="0"/>
-          </a:p>
-        </p:txBody>
-      </p:sp>
-      <p:sp>
-        <p:nvSpPr>
-          <p:cNvPr id="11" name="Text 9"/>
-          <p:cNvSpPr txBox="1"/>
-          <p:nvPr/>
-        </p:nvSpPr>
-        <p:spPr>
-          <a:xfrm>
-            <a:off x="457200" y="4754880"/>
-            <a:ext cx="4572000" cy="182880"/>
+              <a:t>der Besitz entscheidet</a:t>
+            </a:r>
+            <a:endParaRPr lang="en-US" sz="1100" dirty="0"/>
+          </a:p>
+        </p:txBody>
+      </p:sp>
+      <p:sp>
+        <p:nvSpPr>
+          <p:cNvPr id="12" name="Text 10"/>
+          <p:cNvSpPr txBox="1"/>
+          <p:nvPr/>
+        </p:nvSpPr>
+        <p:spPr>
+          <a:xfrm>
+            <a:off x="4892040" y="1965960"/>
+            <a:ext cx="3611880" cy="1554480"/>
           </a:xfrm>
           <a:prstGeom prst="rect">
             <a:avLst/>
@@ -7106,18 +7456,169 @@
           <a:bodyPr wrap="square" lIns="0" tIns="0" rIns="0" bIns="0" rtlCol="0" anchor="t"/>
           <a:lstStyle/>
           <a:p>
-            <a:pPr indent="0" marL="0">
-              <a:buNone/>
-            </a:pPr>
-            <a:r>
-              <a:rPr lang="en-US" sz="900" dirty="0">
-                <a:solidFill>
-                  <a:srgbClr val="998C77"/>
+            <a:pPr marL="342900" indent="-342900">
+              <a:spcAft>
+                <a:spcPts val="600"/>
+              </a:spcAft>
+              <a:buSzPct val="100000"/>
+              <a:buChar char="•"/>
+            </a:pPr>
+            <a:r>
+              <a:rPr lang="en-US" sz="1300" dirty="0">
+                <a:solidFill>
+                  <a:srgbClr val="2B2318"/>
                 </a:solidFill>
                 <a:latin typeface="Calibri" pitchFamily="34" charset="0"/>
                 <a:ea typeface="Calibri" pitchFamily="34" charset="-122"/>
                 <a:cs typeface="Calibri" pitchFamily="34" charset="-120"/>
               </a:rPr>
+              <a:t>Archont kann nur die 1. Klasse werden.</a:t>
+            </a:r>
+            <a:endParaRPr lang="en-US" sz="1300" dirty="0"/>
+          </a:p>
+          <a:p>
+            <a:pPr marL="342900" indent="-342900">
+              <a:spcAft>
+                <a:spcPts val="600"/>
+              </a:spcAft>
+              <a:buSzPct val="100000"/>
+              <a:buChar char="•"/>
+            </a:pPr>
+            <a:r>
+              <a:rPr lang="en-US" sz="1300" dirty="0">
+                <a:solidFill>
+                  <a:srgbClr val="2B2318"/>
+                </a:solidFill>
+                <a:latin typeface="Calibri" pitchFamily="34" charset="0"/>
+                <a:ea typeface="Calibri" pitchFamily="34" charset="-122"/>
+                <a:cs typeface="Calibri" pitchFamily="34" charset="-120"/>
+              </a:rPr>
+              <a:t>In den Rat der 400 dürfen nur die Klassen 1–3.</a:t>
+            </a:r>
+            <a:endParaRPr lang="en-US" sz="1300" dirty="0"/>
+          </a:p>
+          <a:p>
+            <a:pPr marL="342900" indent="-342900">
+              <a:spcAft>
+                <a:spcPts val="600"/>
+              </a:spcAft>
+              <a:buSzPct val="100000"/>
+              <a:buChar char="•"/>
+            </a:pPr>
+            <a:r>
+              <a:rPr lang="en-US" sz="1300" dirty="0">
+                <a:solidFill>
+                  <a:srgbClr val="2B2318"/>
+                </a:solidFill>
+                <a:latin typeface="Calibri" pitchFamily="34" charset="0"/>
+                <a:ea typeface="Calibri" pitchFamily="34" charset="-122"/>
+                <a:cs typeface="Calibri" pitchFamily="34" charset="-120"/>
+              </a:rPr>
+              <a:t>Der Areopag besteht aus ehemaligen Archonten.</a:t>
+            </a:r>
+            <a:endParaRPr lang="en-US" sz="1300" dirty="0"/>
+          </a:p>
+        </p:txBody>
+      </p:sp>
+      <p:sp>
+        <p:nvSpPr>
+          <p:cNvPr id="13" name="Shape 11"/>
+          <p:cNvSpPr/>
+          <p:nvPr/>
+        </p:nvSpPr>
+        <p:spPr>
+          <a:xfrm>
+            <a:off x="457200" y="3703320"/>
+            <a:ext cx="8229600" cy="749808"/>
+          </a:xfrm>
+          <a:prstGeom prst="roundRect">
+            <a:avLst>
+              <a:gd name="adj" fmla="val 9756"/>
+            </a:avLst>
+          </a:prstGeom>
+          <a:solidFill>
+            <a:srgbClr val="2B2318"/>
+          </a:solidFill>
+          <a:ln w="12700">
+            <a:solidFill>
+              <a:srgbClr val="2B2318"/>
+            </a:solidFill>
+            <a:prstDash val="solid"/>
+          </a:ln>
+        </p:spPr>
+      </p:sp>
+      <p:sp>
+        <p:nvSpPr>
+          <p:cNvPr id="14" name="Text 12"/>
+          <p:cNvSpPr txBox="1"/>
+          <p:nvPr/>
+        </p:nvSpPr>
+        <p:spPr>
+          <a:xfrm>
+            <a:off x="685800" y="3703320"/>
+            <a:ext cx="7772400" cy="749808"/>
+          </a:xfrm>
+          <a:prstGeom prst="rect">
+            <a:avLst/>
+          </a:prstGeom>
+          <a:noFill/>
+          <a:ln/>
+        </p:spPr>
+        <p:txBody>
+          <a:bodyPr wrap="square" lIns="0" tIns="0" rIns="0" bIns="0" rtlCol="0" anchor="ctr"/>
+          <a:lstStyle/>
+          <a:p>
+            <a:pPr indent="0" marL="0">
+              <a:buNone/>
+            </a:pPr>
+            <a:r>
+              <a:rPr lang="en-US" sz="1350" b="1" dirty="0">
+                <a:solidFill>
+                  <a:srgbClr val="FFFFFF"/>
+                </a:solidFill>
+                <a:latin typeface="Calibri" pitchFamily="34" charset="0"/>
+                <a:ea typeface="Calibri" pitchFamily="34" charset="-122"/>
+                <a:cs typeface="Calibri" pitchFamily="34" charset="-120"/>
+              </a:rPr>
+              <a:t>Solons Verfassung ist beides: Beim Entscheiden redet das Volk mit, die Ämter bleiben den Reichen. Was müsste sich ändern, damit Athen eine Demokratie wird?</a:t>
+            </a:r>
+            <a:endParaRPr lang="en-US" sz="1350" dirty="0"/>
+          </a:p>
+        </p:txBody>
+      </p:sp>
+      <p:sp>
+        <p:nvSpPr>
+          <p:cNvPr id="15" name="Text 13"/>
+          <p:cNvSpPr txBox="1"/>
+          <p:nvPr/>
+        </p:nvSpPr>
+        <p:spPr>
+          <a:xfrm>
+            <a:off x="457200" y="4754880"/>
+            <a:ext cx="4572000" cy="182880"/>
+          </a:xfrm>
+          <a:prstGeom prst="rect">
+            <a:avLst/>
+          </a:prstGeom>
+          <a:noFill/>
+          <a:ln/>
+        </p:spPr>
+        <p:txBody>
+          <a:bodyPr wrap="square" lIns="0" tIns="0" rIns="0" bIns="0" rtlCol="0" anchor="t"/>
+          <a:lstStyle/>
+          <a:p>
+            <a:pPr indent="0" marL="0">
+              <a:buNone/>
+            </a:pPr>
+            <a:r>
+              <a:rPr lang="en-US" sz="900" dirty="0">
+                <a:solidFill>
+                  <a:srgbClr val="998C77"/>
+                </a:solidFill>
+                <a:latin typeface="Calibri" pitchFamily="34" charset="0"/>
+                <a:ea typeface="Calibri" pitchFamily="34" charset="-122"/>
+                <a:cs typeface="Calibri" pitchFamily="34" charset="-120"/>
+              </a:rPr>
               <a:t>Geld statt Blut? Solons Verfassung</a:t>
             </a:r>
             <a:endParaRPr lang="en-US" sz="900" dirty="0"/>
@@ -7126,7 +7627,7 @@
       </p:sp>
       <p:sp>
         <p:nvSpPr>
-          <p:cNvPr id="12" name="Text 10"/>
+          <p:cNvPr id="16" name="Text 14"/>
           <p:cNvSpPr txBox="1"/>
           <p:nvPr/>
         </p:nvSpPr>
@@ -7174,6 +7675,1060 @@
 <file path=ppt/slides/slide16.xml><?xml version="1.0" encoding="utf-8"?>
 <p:sld xmlns:a="http://schemas.openxmlformats.org/drawingml/2006/main" xmlns:r="http://schemas.openxmlformats.org/officeDocument/2006/relationships" xmlns:p="http://schemas.openxmlformats.org/presentationml/2006/main">
   <p:cSld name="Slide 16">
+    <p:bg>
+      <p:bgPr>
+        <a:solidFill>
+          <a:srgbClr val="FFFFFF"/>
+        </a:solidFill>
+      </p:bgPr>
+    </p:bg>
+    <p:spTree>
+      <p:nvGrpSpPr>
+        <p:cNvPr id="1" name=""/>
+        <p:cNvGrpSpPr/>
+        <p:nvPr/>
+      </p:nvGrpSpPr>
+      <p:grpSpPr>
+        <a:xfrm>
+          <a:off x="0" y="0"/>
+          <a:ext cx="0" cy="0"/>
+          <a:chOff x="0" y="0"/>
+          <a:chExt cx="0" cy="0"/>
+        </a:xfrm>
+      </p:grpSpPr>
+      <p:sp>
+        <p:nvSpPr>
+          <p:cNvPr id="2" name="Text 0"/>
+          <p:cNvSpPr txBox="1"/>
+          <p:nvPr/>
+        </p:nvSpPr>
+        <p:spPr>
+          <a:xfrm>
+            <a:off x="457200" y="320040"/>
+            <a:ext cx="6766560" cy="228600"/>
+          </a:xfrm>
+          <a:prstGeom prst="rect">
+            <a:avLst/>
+          </a:prstGeom>
+          <a:noFill/>
+          <a:ln/>
+        </p:spPr>
+        <p:txBody>
+          <a:bodyPr wrap="square" lIns="0" tIns="0" rIns="0" bIns="0" rtlCol="0" anchor="t"/>
+          <a:lstStyle/>
+          <a:p>
+            <a:pPr indent="0" marL="0">
+              <a:buNone/>
+            </a:pPr>
+            <a:r>
+              <a:rPr lang="en-US" sz="1100" b="1" spc="200" kern="0" dirty="0">
+                <a:solidFill>
+                  <a:srgbClr val="AD4426"/>
+                </a:solidFill>
+                <a:latin typeface="Calibri" pitchFamily="34" charset="0"/>
+                <a:ea typeface="Calibri" pitchFamily="34" charset="-122"/>
+                <a:cs typeface="Calibri" pitchFamily="34" charset="-120"/>
+              </a:rPr>
+              <a:t>EINZELARBEIT · HEFT</a:t>
+            </a:r>
+            <a:endParaRPr lang="en-US" sz="1100" dirty="0"/>
+          </a:p>
+        </p:txBody>
+      </p:sp>
+      <p:sp>
+        <p:nvSpPr>
+          <p:cNvPr id="3" name="Text 1"/>
+          <p:cNvSpPr txBox="1"/>
+          <p:nvPr/>
+        </p:nvSpPr>
+        <p:spPr>
+          <a:xfrm>
+            <a:off x="457200" y="548640"/>
+            <a:ext cx="8229600" cy="594360"/>
+          </a:xfrm>
+          <a:prstGeom prst="rect">
+            <a:avLst/>
+          </a:prstGeom>
+          <a:noFill/>
+          <a:ln/>
+        </p:spPr>
+        <p:txBody>
+          <a:bodyPr wrap="square" lIns="0" tIns="0" rIns="0" bIns="0" rtlCol="0" anchor="t"/>
+          <a:lstStyle/>
+          <a:p>
+            <a:pPr indent="0" marL="0">
+              <a:buNone/>
+            </a:pPr>
+            <a:r>
+              <a:rPr lang="en-US" sz="2800" b="1" dirty="0">
+                <a:solidFill>
+                  <a:srgbClr val="2B2318"/>
+                </a:solidFill>
+                <a:latin typeface="Cambria" pitchFamily="34" charset="0"/>
+                <a:ea typeface="Cambria" pitchFamily="34" charset="-122"/>
+                <a:cs typeface="Cambria" pitchFamily="34" charset="-120"/>
+              </a:rPr>
+              <a:t>Dein Urteil</a:t>
+            </a:r>
+            <a:endParaRPr lang="en-US" sz="2800" dirty="0"/>
+          </a:p>
+        </p:txBody>
+      </p:sp>
+      <p:sp>
+        <p:nvSpPr>
+          <p:cNvPr id="4" name="Text 2"/>
+          <p:cNvSpPr txBox="1"/>
+          <p:nvPr/>
+        </p:nvSpPr>
+        <p:spPr>
+          <a:xfrm>
+            <a:off x="7315200" y="347472"/>
+            <a:ext cx="1371600" cy="292608"/>
+          </a:xfrm>
+          <a:prstGeom prst="roundRect">
+            <a:avLst>
+              <a:gd name="adj" fmla="val 31250"/>
+            </a:avLst>
+          </a:prstGeom>
+          <a:solidFill>
+            <a:srgbClr val="2B2318"/>
+          </a:solidFill>
+          <a:ln/>
+        </p:spPr>
+        <p:txBody>
+          <a:bodyPr wrap="square" lIns="25400" tIns="25400" rIns="25400" bIns="25400" rtlCol="0" anchor="ctr"/>
+          <a:lstStyle/>
+          <a:p>
+            <a:pPr algn="ctr" indent="0" marL="0">
+              <a:buNone/>
+            </a:pPr>
+            <a:r>
+              <a:rPr lang="en-US" sz="1100" b="1" dirty="0">
+                <a:solidFill>
+                  <a:srgbClr val="FFFFFF"/>
+                </a:solidFill>
+                <a:latin typeface="Calibri" pitchFamily="34" charset="0"/>
+                <a:ea typeface="Calibri" pitchFamily="34" charset="-122"/>
+                <a:cs typeface="Calibri" pitchFamily="34" charset="-120"/>
+              </a:rPr>
+              <a:t>3 Min.</a:t>
+            </a:r>
+            <a:endParaRPr lang="en-US" sz="1100" dirty="0"/>
+          </a:p>
+        </p:txBody>
+      </p:sp>
+      <p:sp>
+        <p:nvSpPr>
+          <p:cNvPr id="5" name="Text 3"/>
+          <p:cNvSpPr txBox="1"/>
+          <p:nvPr/>
+        </p:nvSpPr>
+        <p:spPr>
+          <a:xfrm>
+            <a:off x="457200" y="1234440"/>
+            <a:ext cx="1554480" cy="1024128"/>
+          </a:xfrm>
+          <a:prstGeom prst="roundRect">
+            <a:avLst>
+              <a:gd name="adj" fmla="val 7143"/>
+            </a:avLst>
+          </a:prstGeom>
+          <a:solidFill>
+            <a:srgbClr val="D9A441"/>
+          </a:solidFill>
+          <a:ln/>
+        </p:spPr>
+        <p:txBody>
+          <a:bodyPr wrap="square" lIns="0" tIns="0" rIns="0" bIns="0" rtlCol="0" anchor="ctr"/>
+          <a:lstStyle/>
+          <a:p>
+            <a:pPr algn="ctr" indent="0" marL="0">
+              <a:buNone/>
+            </a:pPr>
+            <a:r>
+              <a:rPr lang="en-US" sz="1500" b="1" dirty="0">
+                <a:solidFill>
+                  <a:srgbClr val="2B2318"/>
+                </a:solidFill>
+                <a:latin typeface="Calibri" pitchFamily="34" charset="0"/>
+                <a:ea typeface="Calibri" pitchFamily="34" charset="-122"/>
+                <a:cs typeface="Calibri" pitchFamily="34" charset="-120"/>
+              </a:rPr>
+              <a:t>Sachurteil</a:t>
+            </a:r>
+            <a:endParaRPr lang="en-US" sz="1500" dirty="0"/>
+          </a:p>
+        </p:txBody>
+      </p:sp>
+      <p:sp>
+        <p:nvSpPr>
+          <p:cNvPr id="6" name="Shape 4"/>
+          <p:cNvSpPr/>
+          <p:nvPr/>
+        </p:nvSpPr>
+        <p:spPr>
+          <a:xfrm>
+            <a:off x="2103120" y="1234440"/>
+            <a:ext cx="6583680" cy="1024128"/>
+          </a:xfrm>
+          <a:prstGeom prst="roundRect">
+            <a:avLst>
+              <a:gd name="adj" fmla="val 7143"/>
+            </a:avLst>
+          </a:prstGeom>
+          <a:solidFill>
+            <a:srgbClr val="F4ECDE"/>
+          </a:solidFill>
+          <a:ln w="12700">
+            <a:solidFill>
+              <a:srgbClr val="F4ECDE"/>
+            </a:solidFill>
+            <a:prstDash val="solid"/>
+          </a:ln>
+        </p:spPr>
+      </p:sp>
+      <p:sp>
+        <p:nvSpPr>
+          <p:cNvPr id="7" name="Text 5"/>
+          <p:cNvSpPr txBox="1"/>
+          <p:nvPr/>
+        </p:nvSpPr>
+        <p:spPr>
+          <a:xfrm>
+            <a:off x="2286000" y="1325880"/>
+            <a:ext cx="6263640" cy="411480"/>
+          </a:xfrm>
+          <a:prstGeom prst="rect">
+            <a:avLst/>
+          </a:prstGeom>
+          <a:noFill/>
+          <a:ln/>
+        </p:spPr>
+        <p:txBody>
+          <a:bodyPr wrap="square" lIns="0" tIns="0" rIns="0" bIns="0" rtlCol="0" anchor="t"/>
+          <a:lstStyle/>
+          <a:p>
+            <a:pPr indent="0" marL="0">
+              <a:buNone/>
+            </a:pPr>
+            <a:r>
+              <a:rPr lang="en-US" sz="1300" b="1" dirty="0">
+                <a:solidFill>
+                  <a:srgbClr val="2B2318"/>
+                </a:solidFill>
+                <a:latin typeface="Calibri" pitchFamily="34" charset="0"/>
+                <a:ea typeface="Calibri" pitchFamily="34" charset="-122"/>
+                <a:cs typeface="Calibri" pitchFamily="34" charset="-120"/>
+              </a:rPr>
+              <a:t>War Solons Verfassung eher demokratisch oder eher timokratisch? (2–3 Sätze)</a:t>
+            </a:r>
+            <a:endParaRPr lang="en-US" sz="1300" dirty="0"/>
+          </a:p>
+        </p:txBody>
+      </p:sp>
+      <p:sp>
+        <p:nvSpPr>
+          <p:cNvPr id="8" name="Text 6"/>
+          <p:cNvSpPr txBox="1"/>
+          <p:nvPr/>
+        </p:nvSpPr>
+        <p:spPr>
+          <a:xfrm>
+            <a:off x="2286000" y="1783080"/>
+            <a:ext cx="6263640" cy="411480"/>
+          </a:xfrm>
+          <a:prstGeom prst="rect">
+            <a:avLst/>
+          </a:prstGeom>
+          <a:noFill/>
+          <a:ln/>
+        </p:spPr>
+        <p:txBody>
+          <a:bodyPr wrap="square" lIns="0" tIns="0" rIns="0" bIns="0" rtlCol="0" anchor="t"/>
+          <a:lstStyle/>
+          <a:p>
+            <a:pPr indent="0" marL="0">
+              <a:buNone/>
+            </a:pPr>
+            <a:r>
+              <a:rPr lang="en-US" sz="1250" i="1" dirty="0">
+                <a:solidFill>
+                  <a:srgbClr val="5A5044"/>
+                </a:solidFill>
+                <a:latin typeface="Calibri" pitchFamily="34" charset="0"/>
+                <a:ea typeface="Calibri" pitchFamily="34" charset="-122"/>
+                <a:cs typeface="Calibri" pitchFamily="34" charset="-120"/>
+              </a:rPr>
+              <a:t>„Aus Sicht der damaligen Zeit war Solons Verfassung eher …, denn …“</a:t>
+            </a:r>
+            <a:endParaRPr lang="en-US" sz="1250" dirty="0"/>
+          </a:p>
+        </p:txBody>
+      </p:sp>
+      <p:sp>
+        <p:nvSpPr>
+          <p:cNvPr id="9" name="Text 7"/>
+          <p:cNvSpPr txBox="1"/>
+          <p:nvPr/>
+        </p:nvSpPr>
+        <p:spPr>
+          <a:xfrm>
+            <a:off x="457200" y="2423160"/>
+            <a:ext cx="1554480" cy="1024128"/>
+          </a:xfrm>
+          <a:prstGeom prst="roundRect">
+            <a:avLst>
+              <a:gd name="adj" fmla="val 7143"/>
+            </a:avLst>
+          </a:prstGeom>
+          <a:solidFill>
+            <a:srgbClr val="AD4426"/>
+          </a:solidFill>
+          <a:ln/>
+        </p:spPr>
+        <p:txBody>
+          <a:bodyPr wrap="square" lIns="0" tIns="0" rIns="0" bIns="0" rtlCol="0" anchor="ctr"/>
+          <a:lstStyle/>
+          <a:p>
+            <a:pPr algn="ctr" indent="0" marL="0">
+              <a:buNone/>
+            </a:pPr>
+            <a:r>
+              <a:rPr lang="en-US" sz="1500" b="1" dirty="0">
+                <a:solidFill>
+                  <a:srgbClr val="FFFFFF"/>
+                </a:solidFill>
+                <a:latin typeface="Calibri" pitchFamily="34" charset="0"/>
+                <a:ea typeface="Calibri" pitchFamily="34" charset="-122"/>
+                <a:cs typeface="Calibri" pitchFamily="34" charset="-120"/>
+              </a:rPr>
+              <a:t>Werturteil</a:t>
+            </a:r>
+            <a:endParaRPr lang="en-US" sz="1500" dirty="0"/>
+          </a:p>
+        </p:txBody>
+      </p:sp>
+      <p:sp>
+        <p:nvSpPr>
+          <p:cNvPr id="10" name="Shape 8"/>
+          <p:cNvSpPr/>
+          <p:nvPr/>
+        </p:nvSpPr>
+        <p:spPr>
+          <a:xfrm>
+            <a:off x="2103120" y="2423160"/>
+            <a:ext cx="6583680" cy="1024128"/>
+          </a:xfrm>
+          <a:prstGeom prst="roundRect">
+            <a:avLst>
+              <a:gd name="adj" fmla="val 7143"/>
+            </a:avLst>
+          </a:prstGeom>
+          <a:solidFill>
+            <a:srgbClr val="F4ECDE"/>
+          </a:solidFill>
+          <a:ln w="12700">
+            <a:solidFill>
+              <a:srgbClr val="F4ECDE"/>
+            </a:solidFill>
+            <a:prstDash val="solid"/>
+          </a:ln>
+        </p:spPr>
+      </p:sp>
+      <p:sp>
+        <p:nvSpPr>
+          <p:cNvPr id="11" name="Text 9"/>
+          <p:cNvSpPr txBox="1"/>
+          <p:nvPr/>
+        </p:nvSpPr>
+        <p:spPr>
+          <a:xfrm>
+            <a:off x="2286000" y="2514600"/>
+            <a:ext cx="6263640" cy="411480"/>
+          </a:xfrm>
+          <a:prstGeom prst="rect">
+            <a:avLst/>
+          </a:prstGeom>
+          <a:noFill/>
+          <a:ln/>
+        </p:spPr>
+        <p:txBody>
+          <a:bodyPr wrap="square" lIns="0" tIns="0" rIns="0" bIns="0" rtlCol="0" anchor="t"/>
+          <a:lstStyle/>
+          <a:p>
+            <a:pPr indent="0" marL="0">
+              <a:buNone/>
+            </a:pPr>
+            <a:r>
+              <a:rPr lang="en-US" sz="1300" b="1" dirty="0">
+                <a:solidFill>
+                  <a:srgbClr val="2B2318"/>
+                </a:solidFill>
+                <a:latin typeface="Calibri" pitchFamily="34" charset="0"/>
+                <a:ea typeface="Calibri" pitchFamily="34" charset="-122"/>
+                <a:cs typeface="Calibri" pitchFamily="34" charset="-120"/>
+              </a:rPr>
+              <a:t>Ist es gerecht, dass die Ämter vom Besitz abhängen? Nenne deinen Maßstab (1–4).</a:t>
+            </a:r>
+            <a:endParaRPr lang="en-US" sz="1300" dirty="0"/>
+          </a:p>
+        </p:txBody>
+      </p:sp>
+      <p:sp>
+        <p:nvSpPr>
+          <p:cNvPr id="12" name="Text 10"/>
+          <p:cNvSpPr txBox="1"/>
+          <p:nvPr/>
+        </p:nvSpPr>
+        <p:spPr>
+          <a:xfrm>
+            <a:off x="2286000" y="2971800"/>
+            <a:ext cx="6263640" cy="411480"/>
+          </a:xfrm>
+          <a:prstGeom prst="rect">
+            <a:avLst/>
+          </a:prstGeom>
+          <a:noFill/>
+          <a:ln/>
+        </p:spPr>
+        <p:txBody>
+          <a:bodyPr wrap="square" lIns="0" tIns="0" rIns="0" bIns="0" rtlCol="0" anchor="t"/>
+          <a:lstStyle/>
+          <a:p>
+            <a:pPr indent="0" marL="0">
+              <a:buNone/>
+            </a:pPr>
+            <a:r>
+              <a:rPr lang="en-US" sz="1250" i="1" dirty="0">
+                <a:solidFill>
+                  <a:srgbClr val="5A5044"/>
+                </a:solidFill>
+                <a:latin typeface="Calibri" pitchFamily="34" charset="0"/>
+                <a:ea typeface="Calibri" pitchFamily="34" charset="-122"/>
+                <a:cs typeface="Calibri" pitchFamily="34" charset="-120"/>
+              </a:rPr>
+              <a:t>„Gemessen an Maßstab … halte ich das für …, weil …“</a:t>
+            </a:r>
+            <a:endParaRPr lang="en-US" sz="1250" dirty="0"/>
+          </a:p>
+        </p:txBody>
+      </p:sp>
+      <p:sp>
+        <p:nvSpPr>
+          <p:cNvPr id="13" name="Text 11"/>
+          <p:cNvSpPr txBox="1"/>
+          <p:nvPr/>
+        </p:nvSpPr>
+        <p:spPr>
+          <a:xfrm>
+            <a:off x="457200" y="3749040"/>
+            <a:ext cx="8229600" cy="274320"/>
+          </a:xfrm>
+          <a:prstGeom prst="rect">
+            <a:avLst/>
+          </a:prstGeom>
+          <a:noFill/>
+          <a:ln/>
+        </p:spPr>
+        <p:txBody>
+          <a:bodyPr wrap="square" lIns="0" tIns="0" rIns="0" bIns="0" rtlCol="0" anchor="t"/>
+          <a:lstStyle/>
+          <a:p>
+            <a:pPr indent="0" marL="0">
+              <a:buNone/>
+            </a:pPr>
+            <a:r>
+              <a:rPr lang="en-US" sz="1200" b="1" dirty="0">
+                <a:solidFill>
+                  <a:srgbClr val="5A5044"/>
+                </a:solidFill>
+                <a:latin typeface="Calibri" pitchFamily="34" charset="0"/>
+                <a:ea typeface="Calibri" pitchFamily="34" charset="-122"/>
+                <a:cs typeface="Calibri" pitchFamily="34" charset="-120"/>
+              </a:rPr>
+              <a:t>Maßstäbe: 1 Gleichheit · 2 Leistung · 3 Schutz der Schwachen · 4 Gleiche Regeln</a:t>
+            </a:r>
+            <a:endParaRPr lang="en-US" sz="1200" dirty="0"/>
+          </a:p>
+        </p:txBody>
+      </p:sp>
+      <p:sp>
+        <p:nvSpPr>
+          <p:cNvPr id="14" name="Text 12"/>
+          <p:cNvSpPr txBox="1"/>
+          <p:nvPr/>
+        </p:nvSpPr>
+        <p:spPr>
+          <a:xfrm>
+            <a:off x="457200" y="4069080"/>
+            <a:ext cx="8229600" cy="274320"/>
+          </a:xfrm>
+          <a:prstGeom prst="rect">
+            <a:avLst/>
+          </a:prstGeom>
+          <a:noFill/>
+          <a:ln/>
+        </p:spPr>
+        <p:txBody>
+          <a:bodyPr wrap="square" lIns="0" tIns="0" rIns="0" bIns="0" rtlCol="0" anchor="t"/>
+          <a:lstStyle/>
+          <a:p>
+            <a:pPr indent="0" marL="0">
+              <a:buNone/>
+            </a:pPr>
+            <a:r>
+              <a:rPr lang="en-US" sz="1200" i="1" dirty="0">
+                <a:solidFill>
+                  <a:srgbClr val="998C77"/>
+                </a:solidFill>
+                <a:latin typeface="Calibri" pitchFamily="34" charset="0"/>
+                <a:ea typeface="Calibri" pitchFamily="34" charset="-122"/>
+                <a:cs typeface="Calibri" pitchFamily="34" charset="-120"/>
+              </a:rPr>
+              <a:t>In der Stunde: das Sachurteil. Das Werturteil ist Hausaufgabe.</a:t>
+            </a:r>
+            <a:endParaRPr lang="en-US" sz="1200" dirty="0"/>
+          </a:p>
+        </p:txBody>
+      </p:sp>
+      <p:sp>
+        <p:nvSpPr>
+          <p:cNvPr id="15" name="Text 13"/>
+          <p:cNvSpPr txBox="1"/>
+          <p:nvPr/>
+        </p:nvSpPr>
+        <p:spPr>
+          <a:xfrm>
+            <a:off x="457200" y="4754880"/>
+            <a:ext cx="4572000" cy="182880"/>
+          </a:xfrm>
+          <a:prstGeom prst="rect">
+            <a:avLst/>
+          </a:prstGeom>
+          <a:noFill/>
+          <a:ln/>
+        </p:spPr>
+        <p:txBody>
+          <a:bodyPr wrap="square" lIns="0" tIns="0" rIns="0" bIns="0" rtlCol="0" anchor="t"/>
+          <a:lstStyle/>
+          <a:p>
+            <a:pPr indent="0" marL="0">
+              <a:buNone/>
+            </a:pPr>
+            <a:r>
+              <a:rPr lang="en-US" sz="900" dirty="0">
+                <a:solidFill>
+                  <a:srgbClr val="998C77"/>
+                </a:solidFill>
+                <a:latin typeface="Calibri" pitchFamily="34" charset="0"/>
+                <a:ea typeface="Calibri" pitchFamily="34" charset="-122"/>
+                <a:cs typeface="Calibri" pitchFamily="34" charset="-120"/>
+              </a:rPr>
+              <a:t>Geld statt Blut? Solons Verfassung</a:t>
+            </a:r>
+            <a:endParaRPr lang="en-US" sz="900" dirty="0"/>
+          </a:p>
+        </p:txBody>
+      </p:sp>
+      <p:sp>
+        <p:nvSpPr>
+          <p:cNvPr id="16" name="Text 14"/>
+          <p:cNvSpPr txBox="1"/>
+          <p:nvPr/>
+        </p:nvSpPr>
+        <p:spPr>
+          <a:xfrm>
+            <a:off x="8229600" y="4754880"/>
+            <a:ext cx="457200" cy="182880"/>
+          </a:xfrm>
+          <a:prstGeom prst="rect">
+            <a:avLst/>
+          </a:prstGeom>
+          <a:noFill/>
+          <a:ln/>
+        </p:spPr>
+        <p:txBody>
+          <a:bodyPr wrap="square" lIns="0" tIns="0" rIns="0" bIns="0" rtlCol="0" anchor="t"/>
+          <a:lstStyle/>
+          <a:p>
+            <a:pPr algn="r" indent="0" marL="0">
+              <a:buNone/>
+            </a:pPr>
+            <a:r>
+              <a:rPr lang="en-US" sz="900" dirty="0">
+                <a:solidFill>
+                  <a:srgbClr val="998C77"/>
+                </a:solidFill>
+                <a:latin typeface="Calibri" pitchFamily="34" charset="0"/>
+                <a:ea typeface="Calibri" pitchFamily="34" charset="-122"/>
+                <a:cs typeface="Calibri" pitchFamily="34" charset="-120"/>
+              </a:rPr>
+              <a:t>16</a:t>
+            </a:r>
+            <a:endParaRPr lang="en-US" sz="900" dirty="0"/>
+          </a:p>
+        </p:txBody>
+      </p:sp>
+    </p:spTree>
+  </p:cSld>
+  <p:clrMapOvr>
+    <a:masterClrMapping/>
+  </p:clrMapOvr>
+</p:sld>
+</file>
+
+<file path=ppt/slides/slide17.xml><?xml version="1.0" encoding="utf-8"?>
+<p:sld xmlns:a="http://schemas.openxmlformats.org/drawingml/2006/main" xmlns:r="http://schemas.openxmlformats.org/officeDocument/2006/relationships" xmlns:p="http://schemas.openxmlformats.org/presentationml/2006/main">
+  <p:cSld name="Slide 17">
+    <p:bg>
+      <p:bgPr>
+        <a:solidFill>
+          <a:srgbClr val="FFFFFF"/>
+        </a:solidFill>
+      </p:bgPr>
+    </p:bg>
+    <p:spTree>
+      <p:nvGrpSpPr>
+        <p:cNvPr id="1" name=""/>
+        <p:cNvGrpSpPr/>
+        <p:nvPr/>
+      </p:nvGrpSpPr>
+      <p:grpSpPr>
+        <a:xfrm>
+          <a:off x="0" y="0"/>
+          <a:ext cx="0" cy="0"/>
+          <a:chOff x="0" y="0"/>
+          <a:chExt cx="0" cy="0"/>
+        </a:xfrm>
+      </p:grpSpPr>
+      <p:sp>
+        <p:nvSpPr>
+          <p:cNvPr id="2" name="Text 0"/>
+          <p:cNvSpPr txBox="1"/>
+          <p:nvPr/>
+        </p:nvSpPr>
+        <p:spPr>
+          <a:xfrm>
+            <a:off x="457200" y="320040"/>
+            <a:ext cx="6766560" cy="228600"/>
+          </a:xfrm>
+          <a:prstGeom prst="rect">
+            <a:avLst/>
+          </a:prstGeom>
+          <a:noFill/>
+          <a:ln/>
+        </p:spPr>
+        <p:txBody>
+          <a:bodyPr wrap="square" lIns="0" tIns="0" rIns="0" bIns="0" rtlCol="0" anchor="t"/>
+          <a:lstStyle/>
+          <a:p>
+            <a:pPr indent="0" marL="0">
+              <a:buNone/>
+            </a:pPr>
+            <a:r>
+              <a:rPr lang="en-US" sz="1100" b="1" spc="200" kern="0" dirty="0">
+                <a:solidFill>
+                  <a:srgbClr val="AD4426"/>
+                </a:solidFill>
+                <a:latin typeface="Calibri" pitchFamily="34" charset="0"/>
+                <a:ea typeface="Calibri" pitchFamily="34" charset="-122"/>
+                <a:cs typeface="Calibri" pitchFamily="34" charset="-120"/>
+              </a:rPr>
+              <a:t>URTEIL · BEISPIEL</a:t>
+            </a:r>
+            <a:endParaRPr lang="en-US" sz="1100" dirty="0"/>
+          </a:p>
+        </p:txBody>
+      </p:sp>
+      <p:sp>
+        <p:nvSpPr>
+          <p:cNvPr id="3" name="Text 1"/>
+          <p:cNvSpPr txBox="1"/>
+          <p:nvPr/>
+        </p:nvSpPr>
+        <p:spPr>
+          <a:xfrm>
+            <a:off x="457200" y="548640"/>
+            <a:ext cx="8229600" cy="594360"/>
+          </a:xfrm>
+          <a:prstGeom prst="rect">
+            <a:avLst/>
+          </a:prstGeom>
+          <a:noFill/>
+          <a:ln/>
+        </p:spPr>
+        <p:txBody>
+          <a:bodyPr wrap="square" lIns="0" tIns="0" rIns="0" bIns="0" rtlCol="0" anchor="t"/>
+          <a:lstStyle/>
+          <a:p>
+            <a:pPr indent="0" marL="0">
+              <a:buNone/>
+            </a:pPr>
+            <a:r>
+              <a:rPr lang="en-US" sz="2800" b="1" dirty="0">
+                <a:solidFill>
+                  <a:srgbClr val="2B2318"/>
+                </a:solidFill>
+                <a:latin typeface="Cambria" pitchFamily="34" charset="0"/>
+                <a:ea typeface="Cambria" pitchFamily="34" charset="-122"/>
+                <a:cs typeface="Cambria" pitchFamily="34" charset="-120"/>
+              </a:rPr>
+              <a:t>So könnte das Urteil aussehen</a:t>
+            </a:r>
+            <a:endParaRPr lang="en-US" sz="2800" dirty="0"/>
+          </a:p>
+        </p:txBody>
+      </p:sp>
+      <p:sp>
+        <p:nvSpPr>
+          <p:cNvPr id="4" name="Text 2"/>
+          <p:cNvSpPr txBox="1"/>
+          <p:nvPr/>
+        </p:nvSpPr>
+        <p:spPr>
+          <a:xfrm>
+            <a:off x="7315200" y="347472"/>
+            <a:ext cx="1371600" cy="292608"/>
+          </a:xfrm>
+          <a:prstGeom prst="roundRect">
+            <a:avLst>
+              <a:gd name="adj" fmla="val 31250"/>
+            </a:avLst>
+          </a:prstGeom>
+          <a:solidFill>
+            <a:srgbClr val="D9A441"/>
+          </a:solidFill>
+          <a:ln/>
+        </p:spPr>
+        <p:txBody>
+          <a:bodyPr wrap="square" lIns="25400" tIns="25400" rIns="25400" bIns="25400" rtlCol="0" anchor="ctr"/>
+          <a:lstStyle/>
+          <a:p>
+            <a:pPr algn="ctr" indent="0" marL="0">
+              <a:buNone/>
+            </a:pPr>
+            <a:r>
+              <a:rPr lang="en-US" sz="1100" b="1" dirty="0">
+                <a:solidFill>
+                  <a:srgbClr val="2B2318"/>
+                </a:solidFill>
+                <a:latin typeface="Calibri" pitchFamily="34" charset="0"/>
+                <a:ea typeface="Calibri" pitchFamily="34" charset="-122"/>
+                <a:cs typeface="Calibri" pitchFamily="34" charset="-120"/>
+              </a:rPr>
+              <a:t>Lösung</a:t>
+            </a:r>
+            <a:endParaRPr lang="en-US" sz="1100" dirty="0"/>
+          </a:p>
+        </p:txBody>
+      </p:sp>
+      <p:sp>
+        <p:nvSpPr>
+          <p:cNvPr id="5" name="Text 3"/>
+          <p:cNvSpPr txBox="1"/>
+          <p:nvPr/>
+        </p:nvSpPr>
+        <p:spPr>
+          <a:xfrm>
+            <a:off x="457200" y="1234440"/>
+            <a:ext cx="1554480" cy="1508760"/>
+          </a:xfrm>
+          <a:prstGeom prst="roundRect">
+            <a:avLst>
+              <a:gd name="adj" fmla="val 4848"/>
+            </a:avLst>
+          </a:prstGeom>
+          <a:solidFill>
+            <a:srgbClr val="D9A441"/>
+          </a:solidFill>
+          <a:ln/>
+        </p:spPr>
+        <p:txBody>
+          <a:bodyPr wrap="square" lIns="0" tIns="0" rIns="0" bIns="0" rtlCol="0" anchor="ctr"/>
+          <a:lstStyle/>
+          <a:p>
+            <a:pPr algn="ctr" indent="0" marL="0">
+              <a:buNone/>
+            </a:pPr>
+            <a:r>
+              <a:rPr lang="en-US" sz="1500" b="1" dirty="0">
+                <a:solidFill>
+                  <a:srgbClr val="2B2318"/>
+                </a:solidFill>
+                <a:latin typeface="Calibri" pitchFamily="34" charset="0"/>
+                <a:ea typeface="Calibri" pitchFamily="34" charset="-122"/>
+                <a:cs typeface="Calibri" pitchFamily="34" charset="-120"/>
+              </a:rPr>
+              <a:t>Sachurteil</a:t>
+            </a:r>
+            <a:endParaRPr lang="en-US" sz="1500" dirty="0"/>
+          </a:p>
+        </p:txBody>
+      </p:sp>
+      <p:sp>
+        <p:nvSpPr>
+          <p:cNvPr id="6" name="Shape 4"/>
+          <p:cNvSpPr/>
+          <p:nvPr/>
+        </p:nvSpPr>
+        <p:spPr>
+          <a:xfrm>
+            <a:off x="2103120" y="1234440"/>
+            <a:ext cx="6583680" cy="1508760"/>
+          </a:xfrm>
+          <a:prstGeom prst="roundRect">
+            <a:avLst>
+              <a:gd name="adj" fmla="val 4848"/>
+            </a:avLst>
+          </a:prstGeom>
+          <a:solidFill>
+            <a:srgbClr val="F4ECDE"/>
+          </a:solidFill>
+          <a:ln w="12700">
+            <a:solidFill>
+              <a:srgbClr val="F4ECDE"/>
+            </a:solidFill>
+            <a:prstDash val="solid"/>
+          </a:ln>
+        </p:spPr>
+      </p:sp>
+      <p:sp>
+        <p:nvSpPr>
+          <p:cNvPr id="7" name="Text 5"/>
+          <p:cNvSpPr txBox="1"/>
+          <p:nvPr/>
+        </p:nvSpPr>
+        <p:spPr>
+          <a:xfrm>
+            <a:off x="2286000" y="1307592"/>
+            <a:ext cx="6263640" cy="1362456"/>
+          </a:xfrm>
+          <a:prstGeom prst="rect">
+            <a:avLst/>
+          </a:prstGeom>
+          <a:noFill/>
+          <a:ln/>
+        </p:spPr>
+        <p:txBody>
+          <a:bodyPr wrap="square" lIns="0" tIns="0" rIns="0" bIns="0" rtlCol="0" anchor="ctr"/>
+          <a:lstStyle/>
+          <a:p>
+            <a:pPr indent="0" marL="0">
+              <a:buNone/>
+            </a:pPr>
+            <a:r>
+              <a:rPr lang="en-US" sz="1300" i="1" dirty="0">
+                <a:solidFill>
+                  <a:srgbClr val="2B2318"/>
+                </a:solidFill>
+                <a:latin typeface="Calibri" pitchFamily="34" charset="0"/>
+                <a:ea typeface="Calibri" pitchFamily="34" charset="-122"/>
+                <a:cs typeface="Calibri" pitchFamily="34" charset="-120"/>
+              </a:rPr>
+              <a:t>„Aus Sicht der damaligen Zeit war Solons Verfassung eher timokratisch, denn die wichtigen Ämter – Archonten, Rat der 400 und Areopag – blieben den Reichen vorbehalten. Sie enthielt aber schon demokratische Elemente: Alle Bürger stimmten in der Volksversammlung ab und durften klagen.“</a:t>
+            </a:r>
+            <a:endParaRPr lang="en-US" sz="1300" dirty="0"/>
+          </a:p>
+        </p:txBody>
+      </p:sp>
+      <p:sp>
+        <p:nvSpPr>
+          <p:cNvPr id="8" name="Text 6"/>
+          <p:cNvSpPr txBox="1"/>
+          <p:nvPr/>
+        </p:nvSpPr>
+        <p:spPr>
+          <a:xfrm>
+            <a:off x="457200" y="2880360"/>
+            <a:ext cx="1554480" cy="1508760"/>
+          </a:xfrm>
+          <a:prstGeom prst="roundRect">
+            <a:avLst>
+              <a:gd name="adj" fmla="val 4848"/>
+            </a:avLst>
+          </a:prstGeom>
+          <a:solidFill>
+            <a:srgbClr val="AD4426"/>
+          </a:solidFill>
+          <a:ln/>
+        </p:spPr>
+        <p:txBody>
+          <a:bodyPr wrap="square" lIns="0" tIns="0" rIns="0" bIns="0" rtlCol="0" anchor="ctr"/>
+          <a:lstStyle/>
+          <a:p>
+            <a:pPr algn="ctr" indent="0" marL="0">
+              <a:buNone/>
+            </a:pPr>
+            <a:r>
+              <a:rPr lang="en-US" sz="1500" b="1" dirty="0">
+                <a:solidFill>
+                  <a:srgbClr val="FFFFFF"/>
+                </a:solidFill>
+                <a:latin typeface="Calibri" pitchFamily="34" charset="0"/>
+                <a:ea typeface="Calibri" pitchFamily="34" charset="-122"/>
+                <a:cs typeface="Calibri" pitchFamily="34" charset="-120"/>
+              </a:rPr>
+              <a:t>Werturteil</a:t>
+            </a:r>
+            <a:endParaRPr lang="en-US" sz="1500" dirty="0"/>
+          </a:p>
+        </p:txBody>
+      </p:sp>
+      <p:sp>
+        <p:nvSpPr>
+          <p:cNvPr id="9" name="Shape 7"/>
+          <p:cNvSpPr/>
+          <p:nvPr/>
+        </p:nvSpPr>
+        <p:spPr>
+          <a:xfrm>
+            <a:off x="2103120" y="2880360"/>
+            <a:ext cx="6583680" cy="1508760"/>
+          </a:xfrm>
+          <a:prstGeom prst="roundRect">
+            <a:avLst>
+              <a:gd name="adj" fmla="val 4848"/>
+            </a:avLst>
+          </a:prstGeom>
+          <a:solidFill>
+            <a:srgbClr val="F4ECDE"/>
+          </a:solidFill>
+          <a:ln w="12700">
+            <a:solidFill>
+              <a:srgbClr val="F4ECDE"/>
+            </a:solidFill>
+            <a:prstDash val="solid"/>
+          </a:ln>
+        </p:spPr>
+      </p:sp>
+      <p:sp>
+        <p:nvSpPr>
+          <p:cNvPr id="10" name="Text 8"/>
+          <p:cNvSpPr txBox="1"/>
+          <p:nvPr/>
+        </p:nvSpPr>
+        <p:spPr>
+          <a:xfrm>
+            <a:off x="2286000" y="2953512"/>
+            <a:ext cx="6263640" cy="1362456"/>
+          </a:xfrm>
+          <a:prstGeom prst="rect">
+            <a:avLst/>
+          </a:prstGeom>
+          <a:noFill/>
+          <a:ln/>
+        </p:spPr>
+        <p:txBody>
+          <a:bodyPr wrap="square" lIns="0" tIns="0" rIns="0" bIns="0" rtlCol="0" anchor="ctr"/>
+          <a:lstStyle/>
+          <a:p>
+            <a:pPr indent="0" marL="0">
+              <a:buNone/>
+            </a:pPr>
+            <a:r>
+              <a:rPr lang="en-US" sz="1300" i="1" dirty="0">
+                <a:solidFill>
+                  <a:srgbClr val="2B2318"/>
+                </a:solidFill>
+                <a:latin typeface="Calibri" pitchFamily="34" charset="0"/>
+                <a:ea typeface="Calibri" pitchFamily="34" charset="-122"/>
+                <a:cs typeface="Calibri" pitchFamily="34" charset="-120"/>
+              </a:rPr>
+              <a:t>„Gemessen an Maßstab 1 (Gleichheit) halte ich es für ungerecht, dass die Ämter vom Besitz abhingen, weil arme Bürger so nie selbst regieren konnten. Gemessen an Maßstab 2 (Leistung) lässt es sich begründen: Die Reichen trugen mehr Lasten, etwa die eigene Rüstung im Krieg.“</a:t>
+            </a:r>
+            <a:endParaRPr lang="en-US" sz="1300" dirty="0"/>
+          </a:p>
+        </p:txBody>
+      </p:sp>
+      <p:sp>
+        <p:nvSpPr>
+          <p:cNvPr id="11" name="Text 9"/>
+          <p:cNvSpPr txBox="1"/>
+          <p:nvPr/>
+        </p:nvSpPr>
+        <p:spPr>
+          <a:xfrm>
+            <a:off x="457200" y="4754880"/>
+            <a:ext cx="4572000" cy="182880"/>
+          </a:xfrm>
+          <a:prstGeom prst="rect">
+            <a:avLst/>
+          </a:prstGeom>
+          <a:noFill/>
+          <a:ln/>
+        </p:spPr>
+        <p:txBody>
+          <a:bodyPr wrap="square" lIns="0" tIns="0" rIns="0" bIns="0" rtlCol="0" anchor="t"/>
+          <a:lstStyle/>
+          <a:p>
+            <a:pPr indent="0" marL="0">
+              <a:buNone/>
+            </a:pPr>
+            <a:r>
+              <a:rPr lang="en-US" sz="900" dirty="0">
+                <a:solidFill>
+                  <a:srgbClr val="998C77"/>
+                </a:solidFill>
+                <a:latin typeface="Calibri" pitchFamily="34" charset="0"/>
+                <a:ea typeface="Calibri" pitchFamily="34" charset="-122"/>
+                <a:cs typeface="Calibri" pitchFamily="34" charset="-120"/>
+              </a:rPr>
+              <a:t>Geld statt Blut? Solons Verfassung</a:t>
+            </a:r>
+            <a:endParaRPr lang="en-US" sz="900" dirty="0"/>
+          </a:p>
+        </p:txBody>
+      </p:sp>
+      <p:sp>
+        <p:nvSpPr>
+          <p:cNvPr id="12" name="Text 10"/>
+          <p:cNvSpPr txBox="1"/>
+          <p:nvPr/>
+        </p:nvSpPr>
+        <p:spPr>
+          <a:xfrm>
+            <a:off x="8229600" y="4754880"/>
+            <a:ext cx="457200" cy="182880"/>
+          </a:xfrm>
+          <a:prstGeom prst="rect">
+            <a:avLst/>
+          </a:prstGeom>
+          <a:noFill/>
+          <a:ln/>
+        </p:spPr>
+        <p:txBody>
+          <a:bodyPr wrap="square" lIns="0" tIns="0" rIns="0" bIns="0" rtlCol="0" anchor="t"/>
+          <a:lstStyle/>
+          <a:p>
+            <a:pPr algn="r" indent="0" marL="0">
+              <a:buNone/>
+            </a:pPr>
+            <a:r>
+              <a:rPr lang="en-US" sz="900" dirty="0">
+                <a:solidFill>
+                  <a:srgbClr val="998C77"/>
+                </a:solidFill>
+                <a:latin typeface="Calibri" pitchFamily="34" charset="0"/>
+                <a:ea typeface="Calibri" pitchFamily="34" charset="-122"/>
+                <a:cs typeface="Calibri" pitchFamily="34" charset="-120"/>
+              </a:rPr>
+              <a:t>17</a:t>
+            </a:r>
+            <a:endParaRPr lang="en-US" sz="900" dirty="0"/>
+          </a:p>
+        </p:txBody>
+      </p:sp>
+    </p:spTree>
+  </p:cSld>
+  <p:clrMapOvr>
+    <a:masterClrMapping/>
+  </p:clrMapOvr>
+</p:sld>
+</file>
+
+<file path=ppt/slides/slide18.xml><?xml version="1.0" encoding="utf-8"?>
+<p:sld xmlns:a="http://schemas.openxmlformats.org/drawingml/2006/main" xmlns:r="http://schemas.openxmlformats.org/officeDocument/2006/relationships" xmlns:p="http://schemas.openxmlformats.org/presentationml/2006/main">
+  <p:cSld name="Slide 18">
     <p:bg>
       <p:bgPr>
         <a:solidFill>
@@ -7452,7 +9007,7 @@
                 <a:ea typeface="Calibri" pitchFamily="34" charset="-122"/>
                 <a:cs typeface="Calibri" pitchFamily="34" charset="-120"/>
               </a:rPr>
-              <a:t>16</a:t>
+              <a:t>18</a:t>
             </a:r>
             <a:endParaRPr lang="en-US" sz="900" dirty="0"/>
           </a:p>
@@ -10679,7 +12234,7 @@
                 <a:ea typeface="Calibri" pitchFamily="34" charset="-122"/>
                 <a:cs typeface="Calibri" pitchFamily="34" charset="-120"/>
               </a:rPr>
-              <a:t>25 Min.</a:t>
+              <a:t>22 Min.</a:t>
             </a:r>
             <a:endParaRPr lang="en-US" sz="1100" dirty="0"/>
           </a:p>
@@ -11112,7 +12667,7 @@
                 <a:ea typeface="Calibri" pitchFamily="34" charset="-122"/>
                 <a:cs typeface="Calibri" pitchFamily="34" charset="-120"/>
               </a:rPr>
-              <a:t>Alle mit demselben Buchstaben vergleichen, klappen die Lösung auf und verbessern.</a:t>
+              <a:t>Alle mit demselben Buchstaben vergleichen, zeigen ihre Antworten vor, holen die Lösungskarte und verbessern.</a:t>
             </a:r>
             <a:endParaRPr lang="en-US" sz="1300" dirty="0"/>
           </a:p>
@@ -11282,7 +12837,7 @@
                 <a:ea typeface="Calibri" pitchFamily="34" charset="-122"/>
                 <a:cs typeface="Calibri" pitchFamily="34" charset="-120"/>
               </a:rPr>
-              <a:t>12 Min.</a:t>
+              <a:t>10 Min.</a:t>
             </a:r>
             <a:endParaRPr lang="en-US" sz="1200" dirty="0"/>
           </a:p>
@@ -11632,7 +13187,7 @@
                 <a:ea typeface="Calibri" pitchFamily="34" charset="-122"/>
                 <a:cs typeface="Calibri" pitchFamily="34" charset="-120"/>
               </a:rPr>
-              <a:t>Lies die Anfrage auf deiner Karte. Die Lösung bleibt nach hinten geknickt!</a:t>
+              <a:t>Lies die Anfrage auf deiner Karte.</a:t>
             </a:r>
             <a:endParaRPr lang="en-US" sz="1350" dirty="0"/>
           </a:p>
@@ -12536,7 +14091,7 @@
                 <a:ea typeface="Calibri" pitchFamily="34" charset="-122"/>
                 <a:cs typeface="Calibri" pitchFamily="34" charset="-120"/>
               </a:rPr>
-              <a:t>Klappt jetzt die Lösung auf. Verbessert und ergänzt eure Antwort im Heft.</a:t>
+              <a:t>Zeigt eure Antworten im Heft am Pult vor – dann bekommt ihr die Lösungskarte. Verbessert und ergänzt.</a:t>
             </a:r>
             <a:endParaRPr lang="en-US" sz="1350" dirty="0"/>
           </a:p>
@@ -12847,7 +14402,7 @@
                 <a:ea typeface="Calibri" pitchFamily="34" charset="-122"/>
                 <a:cs typeface="Calibri" pitchFamily="34" charset="-120"/>
               </a:rPr>
-              <a:t>12 Min.</a:t>
+              <a:t>10 Min.</a:t>
             </a:r>
             <a:endParaRPr lang="en-US" sz="1100" dirty="0"/>
           </a:p>
